--- a/Mapped Curriculum Lessons/Grade 7/Lesson 23 - Inserting and Removing List Items/Inserting and Removing List Items - Slides.pptx
+++ b/Mapped Curriculum Lessons/Grade 7/Lesson 23 - Inserting and Removing List Items/Inserting and Removing List Items - Slides.pptx
@@ -2,28 +2,28 @@
 <file path=ppt/presentation.xml><?xml version="1.0" encoding="utf-8"?>
 <p:presentation xmlns:p="http://schemas.openxmlformats.org/presentationml/2006/main" embedTrueTypeFonts="1" saveSubsetFonts="0">
   <p:sldMasterIdLst>
-    <p:sldMasterId xmlns:r="http://schemas.openxmlformats.org/officeDocument/2006/relationships" id="2147483648" r:id="Rf179424133dc497d"/>
+    <p:sldMasterId xmlns:r="http://schemas.openxmlformats.org/officeDocument/2006/relationships" id="2147483648" r:id="R762feae0b0064dcf"/>
   </p:sldMasterIdLst>
   <p:notesMasterIdLst>
-    <p:notesMasterId xmlns:r="http://schemas.openxmlformats.org/officeDocument/2006/relationships" r:id="Racc339a82dfd4097"/>
+    <p:notesMasterId xmlns:r="http://schemas.openxmlformats.org/officeDocument/2006/relationships" r:id="Raa718404385b44c4"/>
   </p:notesMasterIdLst>
   <p:sldIdLst>
-    <p:sldId xmlns:r="http://schemas.openxmlformats.org/officeDocument/2006/relationships" id="256" r:id="Rf15ae0c85d034cc3"/>
-    <p:sldId xmlns:r="http://schemas.openxmlformats.org/officeDocument/2006/relationships" id="257" r:id="R20cabb91744748c2"/>
-    <p:sldId xmlns:r="http://schemas.openxmlformats.org/officeDocument/2006/relationships" id="258" r:id="Re04d028efb874f38"/>
-    <p:sldId xmlns:r="http://schemas.openxmlformats.org/officeDocument/2006/relationships" id="259" r:id="R87ce6abf89f94ac8"/>
-    <p:sldId xmlns:r="http://schemas.openxmlformats.org/officeDocument/2006/relationships" id="260" r:id="R5c6b64f3671d4adf"/>
-    <p:sldId xmlns:r="http://schemas.openxmlformats.org/officeDocument/2006/relationships" id="261" r:id="R1b9bc68bfe3d4d3c"/>
-    <p:sldId xmlns:r="http://schemas.openxmlformats.org/officeDocument/2006/relationships" id="262" r:id="Rb0dcca84263845e7"/>
-    <p:sldId xmlns:r="http://schemas.openxmlformats.org/officeDocument/2006/relationships" id="263" r:id="R2ddedfb695e74683"/>
-    <p:sldId xmlns:r="http://schemas.openxmlformats.org/officeDocument/2006/relationships" id="264" r:id="R8928e210010b403a"/>
+    <p:sldId xmlns:r="http://schemas.openxmlformats.org/officeDocument/2006/relationships" id="256" r:id="R6b0b34ae9cd348cc"/>
+    <p:sldId xmlns:r="http://schemas.openxmlformats.org/officeDocument/2006/relationships" id="257" r:id="R2409125cda054205"/>
+    <p:sldId xmlns:r="http://schemas.openxmlformats.org/officeDocument/2006/relationships" id="258" r:id="Ra61edb58ca714931"/>
+    <p:sldId xmlns:r="http://schemas.openxmlformats.org/officeDocument/2006/relationships" id="259" r:id="Rda380f222b0e4791"/>
+    <p:sldId xmlns:r="http://schemas.openxmlformats.org/officeDocument/2006/relationships" id="260" r:id="R2f078902087f4f67"/>
+    <p:sldId xmlns:r="http://schemas.openxmlformats.org/officeDocument/2006/relationships" id="261" r:id="R74080bfa5b904bbc"/>
+    <p:sldId xmlns:r="http://schemas.openxmlformats.org/officeDocument/2006/relationships" id="262" r:id="Re8ecbd4f0b054101"/>
+    <p:sldId xmlns:r="http://schemas.openxmlformats.org/officeDocument/2006/relationships" id="263" r:id="R0acde943c32349d8"/>
+    <p:sldId xmlns:r="http://schemas.openxmlformats.org/officeDocument/2006/relationships" id="264" r:id="R166a5acaf75d451c"/>
   </p:sldIdLst>
   <p:sldSz cx="12192000" cy="6858000"/>
   <p:notesSz cx="6858000" cy="9144000"/>
   <p:embeddedFontLst>
     <p:embeddedFont>
       <p:font typeface="JetBrains Mono"/>
-      <p:regular xmlns:r="http://schemas.openxmlformats.org/officeDocument/2006/relationships" r:id="R6181f3fd5eb64922"/>
+      <p:regular xmlns:r="http://schemas.openxmlformats.org/officeDocument/2006/relationships" r:id="R36823e0d9d044560"/>
     </p:embeddedFont>
   </p:embeddedFontLst>
 </p:presentation>
@@ -1071,7 +1071,7 @@
           <p:nvPr/>
         </p:nvPicPr>
         <p:blipFill rotWithShape="1">
-          <a:blip xmlns:r="http://schemas.openxmlformats.org/officeDocument/2006/relationships" xmlns:a="http://schemas.openxmlformats.org/drawingml/2006/main" r:embed="R2acfc50fa56d4458"/>
+          <a:blip xmlns:r="http://schemas.openxmlformats.org/officeDocument/2006/relationships" xmlns:a="http://schemas.openxmlformats.org/drawingml/2006/main" r:embed="Ra9b11b14515c4bf4"/>
           <a:stretch xmlns:a="http://schemas.openxmlformats.org/drawingml/2006/main"/>
         </p:blipFill>
         <p:spPr>
@@ -1451,7 +1451,7 @@
           <p:nvPr/>
         </p:nvPicPr>
         <p:blipFill rotWithShape="1">
-          <a:blip xmlns:r="http://schemas.openxmlformats.org/officeDocument/2006/relationships" xmlns:a="http://schemas.openxmlformats.org/drawingml/2006/main" r:embed="Rfe992191c81a49a2">
+          <a:blip xmlns:r="http://schemas.openxmlformats.org/officeDocument/2006/relationships" xmlns:a="http://schemas.openxmlformats.org/drawingml/2006/main" r:embed="Re5332a9ca1bd418a">
             <a:alphaModFix amt="28000"/>
           </a:blip>
           <a:stretch xmlns:a="http://schemas.openxmlformats.org/drawingml/2006/main"/>
@@ -1664,7 +1664,7 @@
           <p:nvPr/>
         </p:nvPicPr>
         <p:blipFill rotWithShape="1">
-          <a:blip xmlns:r="http://schemas.openxmlformats.org/officeDocument/2006/relationships" xmlns:a="http://schemas.openxmlformats.org/drawingml/2006/main" r:embed="R24796b1dd66f400f">
+          <a:blip xmlns:r="http://schemas.openxmlformats.org/officeDocument/2006/relationships" xmlns:a="http://schemas.openxmlformats.org/drawingml/2006/main" r:embed="R8c5c0a616a9e4c52">
             <a:alphaModFix amt="28000"/>
           </a:blip>
           <a:stretch xmlns:a="http://schemas.openxmlformats.org/drawingml/2006/main"/>
@@ -1899,7 +1899,7 @@
           <p:nvPr/>
         </p:nvPicPr>
         <p:blipFill rotWithShape="1">
-          <a:blip xmlns:r="http://schemas.openxmlformats.org/officeDocument/2006/relationships" xmlns:a="http://schemas.openxmlformats.org/drawingml/2006/main" r:embed="R2a69cc9af11f42c0">
+          <a:blip xmlns:r="http://schemas.openxmlformats.org/officeDocument/2006/relationships" xmlns:a="http://schemas.openxmlformats.org/drawingml/2006/main" r:embed="R24ed4e2669f8421a">
             <a:alphaModFix amt="28000"/>
           </a:blip>
           <a:stretch xmlns:a="http://schemas.openxmlformats.org/drawingml/2006/main"/>
@@ -2176,7 +2176,7 @@
           <p:nvPr/>
         </p:nvPicPr>
         <p:blipFill rotWithShape="1">
-          <a:blip xmlns:r="http://schemas.openxmlformats.org/officeDocument/2006/relationships" xmlns:a="http://schemas.openxmlformats.org/drawingml/2006/main" r:embed="Re5e6d380ca0741ac">
+          <a:blip xmlns:r="http://schemas.openxmlformats.org/officeDocument/2006/relationships" xmlns:a="http://schemas.openxmlformats.org/drawingml/2006/main" r:embed="R093ca30a755c4f86">
             <a:alphaModFix amt="28000"/>
           </a:blip>
           <a:stretch xmlns:a="http://schemas.openxmlformats.org/drawingml/2006/main"/>
@@ -2451,7 +2451,7 @@
           <p:nvPr/>
         </p:nvPicPr>
         <p:blipFill rotWithShape="1">
-          <a:blip xmlns:r="http://schemas.openxmlformats.org/officeDocument/2006/relationships" xmlns:a="http://schemas.openxmlformats.org/drawingml/2006/main" r:embed="R1e27a082612f4f92">
+          <a:blip xmlns:r="http://schemas.openxmlformats.org/officeDocument/2006/relationships" xmlns:a="http://schemas.openxmlformats.org/drawingml/2006/main" r:embed="R1a652be5b64e41d9">
             <a:alphaModFix amt="28000"/>
           </a:blip>
           <a:stretch xmlns:a="http://schemas.openxmlformats.org/drawingml/2006/main"/>
@@ -2875,7 +2875,7 @@
           <p:nvPr/>
         </p:nvPicPr>
         <p:blipFill rotWithShape="1">
-          <a:blip xmlns:r="http://schemas.openxmlformats.org/officeDocument/2006/relationships" xmlns:a="http://schemas.openxmlformats.org/drawingml/2006/main" r:embed="Rc2a864dfe3194e57">
+          <a:blip xmlns:r="http://schemas.openxmlformats.org/officeDocument/2006/relationships" xmlns:a="http://schemas.openxmlformats.org/drawingml/2006/main" r:embed="Ref69b67f7e8e4764">
             <a:alphaModFix amt="28000"/>
           </a:blip>
           <a:stretch xmlns:a="http://schemas.openxmlformats.org/drawingml/2006/main"/>
@@ -3016,7 +3016,7 @@
           <p:nvPr/>
         </p:nvPicPr>
         <p:blipFill rotWithShape="1">
-          <a:blip xmlns:r="http://schemas.openxmlformats.org/officeDocument/2006/relationships" xmlns:a="http://schemas.openxmlformats.org/drawingml/2006/main" r:embed="R462e72a0d5f340a8">
+          <a:blip xmlns:r="http://schemas.openxmlformats.org/officeDocument/2006/relationships" xmlns:a="http://schemas.openxmlformats.org/drawingml/2006/main" r:embed="Rfc52d2bffebc422d">
             <a:alphaModFix amt="28000"/>
           </a:blip>
           <a:stretch xmlns:a="http://schemas.openxmlformats.org/drawingml/2006/main"/>
@@ -3130,7 +3130,7 @@
           <p:nvPr/>
         </p:nvPicPr>
         <p:blipFill rotWithShape="1">
-          <a:blip xmlns:r="http://schemas.openxmlformats.org/officeDocument/2006/relationships" xmlns:a="http://schemas.openxmlformats.org/drawingml/2006/main" r:embed="Rce149ab2c96d4ff5">
+          <a:blip xmlns:r="http://schemas.openxmlformats.org/officeDocument/2006/relationships" xmlns:a="http://schemas.openxmlformats.org/drawingml/2006/main" r:embed="Rb13d0448d2794c52">
             <a:alphaModFix amt="28000"/>
           </a:blip>
           <a:stretch xmlns:a="http://schemas.openxmlformats.org/drawingml/2006/main"/>
@@ -3457,7 +3457,7 @@
           <p:nvPr/>
         </p:nvPicPr>
         <p:blipFill rotWithShape="1">
-          <a:blip xmlns:r="http://schemas.openxmlformats.org/officeDocument/2006/relationships" xmlns:a="http://schemas.openxmlformats.org/drawingml/2006/main" r:embed="Raaa6c7ea5aed48b9">
+          <a:blip xmlns:r="http://schemas.openxmlformats.org/officeDocument/2006/relationships" xmlns:a="http://schemas.openxmlformats.org/drawingml/2006/main" r:embed="R6a3bb64095574c4c">
             <a:alphaModFix amt="28000"/>
           </a:blip>
           <a:stretch xmlns:a="http://schemas.openxmlformats.org/drawingml/2006/main"/>
@@ -3745,7 +3745,7 @@
           <p:nvPr/>
         </p:nvPicPr>
         <p:blipFill rotWithShape="1">
-          <a:blip xmlns:r="http://schemas.openxmlformats.org/officeDocument/2006/relationships" xmlns:a="http://schemas.openxmlformats.org/drawingml/2006/main" r:embed="Rba3fc9bb9c574697">
+          <a:blip xmlns:r="http://schemas.openxmlformats.org/officeDocument/2006/relationships" xmlns:a="http://schemas.openxmlformats.org/drawingml/2006/main" r:embed="R1e58f3d4b6de409b">
             <a:alphaModFix amt="28000"/>
           </a:blip>
           <a:stretch xmlns:a="http://schemas.openxmlformats.org/drawingml/2006/main"/>
@@ -3982,17 +3982,17 @@
   </p:cSld>
   <p:clrMap bg1="lt1" tx1="dk1" bg2="lt2" tx2="dk2" accent1="accent1" accent2="accent2" accent3="accent3" accent4="accent4" accent5="accent5" accent6="accent6" hlink="hlink" folHlink="folHlink"/>
   <p:sldLayoutIdLst>
-    <p:sldLayoutId xmlns:r="http://schemas.openxmlformats.org/officeDocument/2006/relationships" id="2147483649" r:id="Rb49c04fb66f146eb"/>
-    <p:sldLayoutId xmlns:r="http://schemas.openxmlformats.org/officeDocument/2006/relationships" id="2147483650" r:id="R4fd9560605154f1a"/>
-    <p:sldLayoutId xmlns:r="http://schemas.openxmlformats.org/officeDocument/2006/relationships" id="2147483651" r:id="Rc1e61eb8d19649f0"/>
-    <p:sldLayoutId xmlns:r="http://schemas.openxmlformats.org/officeDocument/2006/relationships" id="2147483652" r:id="Rdfd04007fd214edb"/>
-    <p:sldLayoutId xmlns:r="http://schemas.openxmlformats.org/officeDocument/2006/relationships" id="2147483653" r:id="Rfaae296fd21046b2"/>
-    <p:sldLayoutId xmlns:r="http://schemas.openxmlformats.org/officeDocument/2006/relationships" id="2147483654" r:id="R225a1187f5ab4b39"/>
-    <p:sldLayoutId xmlns:r="http://schemas.openxmlformats.org/officeDocument/2006/relationships" id="2147483655" r:id="Rf12501f997384ed6"/>
-    <p:sldLayoutId xmlns:r="http://schemas.openxmlformats.org/officeDocument/2006/relationships" id="2147483656" r:id="Rfc1808e12fb545b1"/>
-    <p:sldLayoutId xmlns:r="http://schemas.openxmlformats.org/officeDocument/2006/relationships" id="2147483657" r:id="Rfc99699f1f684c6c"/>
-    <p:sldLayoutId xmlns:r="http://schemas.openxmlformats.org/officeDocument/2006/relationships" id="2147483658" r:id="Ra2a6971f736746d8"/>
-    <p:sldLayoutId xmlns:r="http://schemas.openxmlformats.org/officeDocument/2006/relationships" id="2147483659" r:id="Rcc863ba7b71d4d68"/>
+    <p:sldLayoutId xmlns:r="http://schemas.openxmlformats.org/officeDocument/2006/relationships" id="2147483649" r:id="Rc3c657250af24c6c"/>
+    <p:sldLayoutId xmlns:r="http://schemas.openxmlformats.org/officeDocument/2006/relationships" id="2147483650" r:id="R87c7f7386ce34988"/>
+    <p:sldLayoutId xmlns:r="http://schemas.openxmlformats.org/officeDocument/2006/relationships" id="2147483651" r:id="R885cb276542b4bd6"/>
+    <p:sldLayoutId xmlns:r="http://schemas.openxmlformats.org/officeDocument/2006/relationships" id="2147483652" r:id="R5f847cc1978c4bc1"/>
+    <p:sldLayoutId xmlns:r="http://schemas.openxmlformats.org/officeDocument/2006/relationships" id="2147483653" r:id="R96b42a3dbc284480"/>
+    <p:sldLayoutId xmlns:r="http://schemas.openxmlformats.org/officeDocument/2006/relationships" id="2147483654" r:id="R5b529fbc918648ed"/>
+    <p:sldLayoutId xmlns:r="http://schemas.openxmlformats.org/officeDocument/2006/relationships" id="2147483655" r:id="R2216a3e19c0f422f"/>
+    <p:sldLayoutId xmlns:r="http://schemas.openxmlformats.org/officeDocument/2006/relationships" id="2147483656" r:id="R2f3a5335dcc645b5"/>
+    <p:sldLayoutId xmlns:r="http://schemas.openxmlformats.org/officeDocument/2006/relationships" id="2147483657" r:id="R83a439038cfb440e"/>
+    <p:sldLayoutId xmlns:r="http://schemas.openxmlformats.org/officeDocument/2006/relationships" id="2147483658" r:id="R746f1b33152544f6"/>
+    <p:sldLayoutId xmlns:r="http://schemas.openxmlformats.org/officeDocument/2006/relationships" id="2147483659" r:id="R24fdb42e53174a85"/>
   </p:sldLayoutIdLst>
   <p:hf hdr="0" ftr="0" dt="0"/>
   <p:txStyles>
@@ -6963,95 +6963,7 @@
                 <a:ea typeface="Calibri"/>
                 <a:cs typeface="Calibri"/>
               </a:rPr>
-              <a:t> at position 2 and keep the removal of </a:t>
-            </a:r>
-            <a:r>
-              <a:rPr sz="2400" b="0">
-                <a:solidFill>
-                  <a:srgbClr val="067D17"/>
-                </a:solidFill>
-                <a:latin typeface="JetBrains Mono"/>
-                <a:ea typeface="JetBrains Mono"/>
-                <a:cs typeface="JetBrains Mono"/>
-              </a:rPr>
-              <a:t>"coat"</a:t>
-            </a:r>
-            <a:r>
-              <a:rPr sz="2400" b="0">
-                <a:solidFill>
-                  <a:srgbClr val="080808"/>
-                </a:solidFill>
-                <a:latin typeface="Calibri"/>
-                <a:ea typeface="Calibri"/>
-                <a:cs typeface="Calibri"/>
-              </a:rPr>
-              <a:t>. The final order must be </a:t>
-            </a:r>
-            <a:r>
-              <a:rPr sz="2400" b="0">
-                <a:solidFill>
-                  <a:srgbClr val="067D17"/>
-                </a:solidFill>
-                <a:latin typeface="JetBrains Mono"/>
-                <a:ea typeface="JetBrains Mono"/>
-                <a:cs typeface="JetBrains Mono"/>
-              </a:rPr>
-              <a:t>"water"</a:t>
-            </a:r>
-            <a:r>
-              <a:rPr sz="2400" b="0">
-                <a:solidFill>
-                  <a:srgbClr val="080808"/>
-                </a:solidFill>
-                <a:latin typeface="Calibri"/>
-                <a:ea typeface="Calibri"/>
-                <a:cs typeface="Calibri"/>
-              </a:rPr>
-              <a:t>, </a:t>
-            </a:r>
-            <a:r>
-              <a:rPr sz="2400" b="0">
-                <a:solidFill>
-                  <a:srgbClr val="067D17"/>
-                </a:solidFill>
-                <a:latin typeface="JetBrains Mono"/>
-                <a:ea typeface="JetBrains Mono"/>
-                <a:cs typeface="JetBrains Mono"/>
-              </a:rPr>
-              <a:t>"snack"</a:t>
-            </a:r>
-            <a:r>
-              <a:rPr sz="2400" b="0">
-                <a:solidFill>
-                  <a:srgbClr val="080808"/>
-                </a:solidFill>
-                <a:latin typeface="Calibri"/>
-                <a:ea typeface="Calibri"/>
-                <a:cs typeface="Calibri"/>
-              </a:rPr>
-              <a:t>, </a:t>
-            </a:r>
-            <a:r>
-              <a:rPr sz="2400" b="0">
-                <a:solidFill>
-                  <a:srgbClr val="067D17"/>
-                </a:solidFill>
-                <a:latin typeface="JetBrains Mono"/>
-                <a:ea typeface="JetBrains Mono"/>
-                <a:cs typeface="JetBrains Mono"/>
-              </a:rPr>
-              <a:t>"torch"</a:t>
-            </a:r>
-            <a:r>
-              <a:rPr sz="2400" b="0">
-                <a:solidFill>
-                  <a:srgbClr val="080808"/>
-                </a:solidFill>
-                <a:latin typeface="Calibri"/>
-                <a:ea typeface="Calibri"/>
-                <a:cs typeface="Calibri"/>
-              </a:rPr>
-              <a:t>.</a:t>
+              <a:t> at position 2 and keep the removal of coat. The final order must be water, snack, torch.</a:t>
             </a:r>
           </a:p>
         </p:txBody>
@@ -7665,51 +7577,7 @@
                 <a:ea typeface="Calibri"/>
                 <a:cs typeface="Calibri"/>
               </a:rPr>
-              <a:t> after each operation. Test </a:t>
-            </a:r>
-            <a:r>
-              <a:rPr sz="2400" b="0">
-                <a:solidFill>
-                  <a:srgbClr val="067D17"/>
-                </a:solidFill>
-                <a:latin typeface="JetBrains Mono"/>
-                <a:ea typeface="JetBrains Mono"/>
-                <a:cs typeface="JetBrains Mono"/>
-              </a:rPr>
-              <a:t>"map"</a:t>
-            </a:r>
-            <a:r>
-              <a:rPr sz="2400" b="0">
-                <a:solidFill>
-                  <a:srgbClr val="080808"/>
-                </a:solidFill>
-                <a:latin typeface="Calibri"/>
-                <a:ea typeface="Calibri"/>
-                <a:cs typeface="Calibri"/>
-              </a:rPr>
-              <a:t> then </a:t>
-            </a:r>
-            <a:r>
-              <a:rPr sz="2400" b="0">
-                <a:solidFill>
-                  <a:srgbClr val="067D17"/>
-                </a:solidFill>
-                <a:latin typeface="JetBrains Mono"/>
-                <a:ea typeface="JetBrains Mono"/>
-                <a:cs typeface="JetBrains Mono"/>
-              </a:rPr>
-              <a:t>"coat"</a:t>
-            </a:r>
-            <a:r>
-              <a:rPr sz="2400" b="0">
-                <a:solidFill>
-                  <a:srgbClr val="080808"/>
-                </a:solidFill>
-                <a:latin typeface="Calibri"/>
-                <a:ea typeface="Calibri"/>
-                <a:cs typeface="Calibri"/>
-              </a:rPr>
-              <a:t>.</a:t>
+              <a:t> after each operation. Test map then coat.</a:t>
             </a:r>
           </a:p>
         </p:txBody>

--- a/Mapped Curriculum Lessons/Grade 7/Lesson 23 - Inserting and Removing List Items/Inserting and Removing List Items - Slides.pptx
+++ b/Mapped Curriculum Lessons/Grade 7/Lesson 23 - Inserting and Removing List Items/Inserting and Removing List Items - Slides.pptx
@@ -2,28 +2,28 @@
 <file path=ppt/presentation.xml><?xml version="1.0" encoding="utf-8"?>
 <p:presentation xmlns:p="http://schemas.openxmlformats.org/presentationml/2006/main" embedTrueTypeFonts="1" saveSubsetFonts="0">
   <p:sldMasterIdLst>
-    <p:sldMasterId xmlns:r="http://schemas.openxmlformats.org/officeDocument/2006/relationships" id="2147483648" r:id="R762feae0b0064dcf"/>
+    <p:sldMasterId xmlns:r="http://schemas.openxmlformats.org/officeDocument/2006/relationships" id="2147483648" r:id="R6f2ba610678c4901"/>
   </p:sldMasterIdLst>
   <p:notesMasterIdLst>
-    <p:notesMasterId xmlns:r="http://schemas.openxmlformats.org/officeDocument/2006/relationships" r:id="Raa718404385b44c4"/>
+    <p:notesMasterId xmlns:r="http://schemas.openxmlformats.org/officeDocument/2006/relationships" r:id="Rb15933d97dbd431e"/>
   </p:notesMasterIdLst>
   <p:sldIdLst>
-    <p:sldId xmlns:r="http://schemas.openxmlformats.org/officeDocument/2006/relationships" id="256" r:id="R6b0b34ae9cd348cc"/>
-    <p:sldId xmlns:r="http://schemas.openxmlformats.org/officeDocument/2006/relationships" id="257" r:id="R2409125cda054205"/>
-    <p:sldId xmlns:r="http://schemas.openxmlformats.org/officeDocument/2006/relationships" id="258" r:id="Ra61edb58ca714931"/>
-    <p:sldId xmlns:r="http://schemas.openxmlformats.org/officeDocument/2006/relationships" id="259" r:id="Rda380f222b0e4791"/>
-    <p:sldId xmlns:r="http://schemas.openxmlformats.org/officeDocument/2006/relationships" id="260" r:id="R2f078902087f4f67"/>
-    <p:sldId xmlns:r="http://schemas.openxmlformats.org/officeDocument/2006/relationships" id="261" r:id="R74080bfa5b904bbc"/>
-    <p:sldId xmlns:r="http://schemas.openxmlformats.org/officeDocument/2006/relationships" id="262" r:id="Re8ecbd4f0b054101"/>
-    <p:sldId xmlns:r="http://schemas.openxmlformats.org/officeDocument/2006/relationships" id="263" r:id="R0acde943c32349d8"/>
-    <p:sldId xmlns:r="http://schemas.openxmlformats.org/officeDocument/2006/relationships" id="264" r:id="R166a5acaf75d451c"/>
+    <p:sldId xmlns:r="http://schemas.openxmlformats.org/officeDocument/2006/relationships" id="256" r:id="R8ef0ea71653e42bc"/>
+    <p:sldId xmlns:r="http://schemas.openxmlformats.org/officeDocument/2006/relationships" id="257" r:id="R1023e3c2bde143b3"/>
+    <p:sldId xmlns:r="http://schemas.openxmlformats.org/officeDocument/2006/relationships" id="258" r:id="R244bd2abaf5c4a53"/>
+    <p:sldId xmlns:r="http://schemas.openxmlformats.org/officeDocument/2006/relationships" id="259" r:id="R4251c52a78484a38"/>
+    <p:sldId xmlns:r="http://schemas.openxmlformats.org/officeDocument/2006/relationships" id="260" r:id="Rf390d4cc8744464d"/>
+    <p:sldId xmlns:r="http://schemas.openxmlformats.org/officeDocument/2006/relationships" id="261" r:id="R8e24ef696be6453f"/>
+    <p:sldId xmlns:r="http://schemas.openxmlformats.org/officeDocument/2006/relationships" id="262" r:id="R29581d9ec14444e6"/>
+    <p:sldId xmlns:r="http://schemas.openxmlformats.org/officeDocument/2006/relationships" id="263" r:id="R82abb0f9530249a9"/>
+    <p:sldId xmlns:r="http://schemas.openxmlformats.org/officeDocument/2006/relationships" id="264" r:id="R6c6ccad4c7c54edf"/>
   </p:sldIdLst>
   <p:sldSz cx="12192000" cy="6858000"/>
   <p:notesSz cx="6858000" cy="9144000"/>
   <p:embeddedFontLst>
     <p:embeddedFont>
       <p:font typeface="JetBrains Mono"/>
-      <p:regular xmlns:r="http://schemas.openxmlformats.org/officeDocument/2006/relationships" r:id="R36823e0d9d044560"/>
+      <p:regular xmlns:r="http://schemas.openxmlformats.org/officeDocument/2006/relationships" r:id="Reeb2003548bf406c"/>
     </p:embeddedFont>
   </p:embeddedFontLst>
 </p:presentation>
@@ -1071,7 +1071,7 @@
           <p:nvPr/>
         </p:nvPicPr>
         <p:blipFill rotWithShape="1">
-          <a:blip xmlns:r="http://schemas.openxmlformats.org/officeDocument/2006/relationships" xmlns:a="http://schemas.openxmlformats.org/drawingml/2006/main" r:embed="Ra9b11b14515c4bf4"/>
+          <a:blip xmlns:r="http://schemas.openxmlformats.org/officeDocument/2006/relationships" xmlns:a="http://schemas.openxmlformats.org/drawingml/2006/main" r:embed="R3edbd1f872954c0e"/>
           <a:stretch xmlns:a="http://schemas.openxmlformats.org/drawingml/2006/main"/>
         </p:blipFill>
         <p:spPr>
@@ -1451,7 +1451,7 @@
           <p:nvPr/>
         </p:nvPicPr>
         <p:blipFill rotWithShape="1">
-          <a:blip xmlns:r="http://schemas.openxmlformats.org/officeDocument/2006/relationships" xmlns:a="http://schemas.openxmlformats.org/drawingml/2006/main" r:embed="Re5332a9ca1bd418a">
+          <a:blip xmlns:r="http://schemas.openxmlformats.org/officeDocument/2006/relationships" xmlns:a="http://schemas.openxmlformats.org/drawingml/2006/main" r:embed="R7babdbe5dfe2423a">
             <a:alphaModFix amt="28000"/>
           </a:blip>
           <a:stretch xmlns:a="http://schemas.openxmlformats.org/drawingml/2006/main"/>
@@ -1664,7 +1664,7 @@
           <p:nvPr/>
         </p:nvPicPr>
         <p:blipFill rotWithShape="1">
-          <a:blip xmlns:r="http://schemas.openxmlformats.org/officeDocument/2006/relationships" xmlns:a="http://schemas.openxmlformats.org/drawingml/2006/main" r:embed="R8c5c0a616a9e4c52">
+          <a:blip xmlns:r="http://schemas.openxmlformats.org/officeDocument/2006/relationships" xmlns:a="http://schemas.openxmlformats.org/drawingml/2006/main" r:embed="R057df974703243a5">
             <a:alphaModFix amt="28000"/>
           </a:blip>
           <a:stretch xmlns:a="http://schemas.openxmlformats.org/drawingml/2006/main"/>
@@ -1899,7 +1899,7 @@
           <p:nvPr/>
         </p:nvPicPr>
         <p:blipFill rotWithShape="1">
-          <a:blip xmlns:r="http://schemas.openxmlformats.org/officeDocument/2006/relationships" xmlns:a="http://schemas.openxmlformats.org/drawingml/2006/main" r:embed="R24ed4e2669f8421a">
+          <a:blip xmlns:r="http://schemas.openxmlformats.org/officeDocument/2006/relationships" xmlns:a="http://schemas.openxmlformats.org/drawingml/2006/main" r:embed="R4717e41a7e3e4dc8">
             <a:alphaModFix amt="28000"/>
           </a:blip>
           <a:stretch xmlns:a="http://schemas.openxmlformats.org/drawingml/2006/main"/>
@@ -2176,7 +2176,7 @@
           <p:nvPr/>
         </p:nvPicPr>
         <p:blipFill rotWithShape="1">
-          <a:blip xmlns:r="http://schemas.openxmlformats.org/officeDocument/2006/relationships" xmlns:a="http://schemas.openxmlformats.org/drawingml/2006/main" r:embed="R093ca30a755c4f86">
+          <a:blip xmlns:r="http://schemas.openxmlformats.org/officeDocument/2006/relationships" xmlns:a="http://schemas.openxmlformats.org/drawingml/2006/main" r:embed="R67184a941aca4cff">
             <a:alphaModFix amt="28000"/>
           </a:blip>
           <a:stretch xmlns:a="http://schemas.openxmlformats.org/drawingml/2006/main"/>
@@ -2451,7 +2451,7 @@
           <p:nvPr/>
         </p:nvPicPr>
         <p:blipFill rotWithShape="1">
-          <a:blip xmlns:r="http://schemas.openxmlformats.org/officeDocument/2006/relationships" xmlns:a="http://schemas.openxmlformats.org/drawingml/2006/main" r:embed="R1a652be5b64e41d9">
+          <a:blip xmlns:r="http://schemas.openxmlformats.org/officeDocument/2006/relationships" xmlns:a="http://schemas.openxmlformats.org/drawingml/2006/main" r:embed="R0caa9f905d0b4a2c">
             <a:alphaModFix amt="28000"/>
           </a:blip>
           <a:stretch xmlns:a="http://schemas.openxmlformats.org/drawingml/2006/main"/>
@@ -2875,7 +2875,7 @@
           <p:nvPr/>
         </p:nvPicPr>
         <p:blipFill rotWithShape="1">
-          <a:blip xmlns:r="http://schemas.openxmlformats.org/officeDocument/2006/relationships" xmlns:a="http://schemas.openxmlformats.org/drawingml/2006/main" r:embed="Ref69b67f7e8e4764">
+          <a:blip xmlns:r="http://schemas.openxmlformats.org/officeDocument/2006/relationships" xmlns:a="http://schemas.openxmlformats.org/drawingml/2006/main" r:embed="Rcd30dcded04d4a93">
             <a:alphaModFix amt="28000"/>
           </a:blip>
           <a:stretch xmlns:a="http://schemas.openxmlformats.org/drawingml/2006/main"/>
@@ -3016,7 +3016,7 @@
           <p:nvPr/>
         </p:nvPicPr>
         <p:blipFill rotWithShape="1">
-          <a:blip xmlns:r="http://schemas.openxmlformats.org/officeDocument/2006/relationships" xmlns:a="http://schemas.openxmlformats.org/drawingml/2006/main" r:embed="Rfc52d2bffebc422d">
+          <a:blip xmlns:r="http://schemas.openxmlformats.org/officeDocument/2006/relationships" xmlns:a="http://schemas.openxmlformats.org/drawingml/2006/main" r:embed="R4e966e720ce145c0">
             <a:alphaModFix amt="28000"/>
           </a:blip>
           <a:stretch xmlns:a="http://schemas.openxmlformats.org/drawingml/2006/main"/>
@@ -3130,7 +3130,7 @@
           <p:nvPr/>
         </p:nvPicPr>
         <p:blipFill rotWithShape="1">
-          <a:blip xmlns:r="http://schemas.openxmlformats.org/officeDocument/2006/relationships" xmlns:a="http://schemas.openxmlformats.org/drawingml/2006/main" r:embed="Rb13d0448d2794c52">
+          <a:blip xmlns:r="http://schemas.openxmlformats.org/officeDocument/2006/relationships" xmlns:a="http://schemas.openxmlformats.org/drawingml/2006/main" r:embed="R96a905a764a249fd">
             <a:alphaModFix amt="28000"/>
           </a:blip>
           <a:stretch xmlns:a="http://schemas.openxmlformats.org/drawingml/2006/main"/>
@@ -3457,7 +3457,7 @@
           <p:nvPr/>
         </p:nvPicPr>
         <p:blipFill rotWithShape="1">
-          <a:blip xmlns:r="http://schemas.openxmlformats.org/officeDocument/2006/relationships" xmlns:a="http://schemas.openxmlformats.org/drawingml/2006/main" r:embed="R6a3bb64095574c4c">
+          <a:blip xmlns:r="http://schemas.openxmlformats.org/officeDocument/2006/relationships" xmlns:a="http://schemas.openxmlformats.org/drawingml/2006/main" r:embed="Rbd3a29132b1d461d">
             <a:alphaModFix amt="28000"/>
           </a:blip>
           <a:stretch xmlns:a="http://schemas.openxmlformats.org/drawingml/2006/main"/>
@@ -3745,7 +3745,7 @@
           <p:nvPr/>
         </p:nvPicPr>
         <p:blipFill rotWithShape="1">
-          <a:blip xmlns:r="http://schemas.openxmlformats.org/officeDocument/2006/relationships" xmlns:a="http://schemas.openxmlformats.org/drawingml/2006/main" r:embed="R1e58f3d4b6de409b">
+          <a:blip xmlns:r="http://schemas.openxmlformats.org/officeDocument/2006/relationships" xmlns:a="http://schemas.openxmlformats.org/drawingml/2006/main" r:embed="R7ccf1cb2ee7c414b">
             <a:alphaModFix amt="28000"/>
           </a:blip>
           <a:stretch xmlns:a="http://schemas.openxmlformats.org/drawingml/2006/main"/>
@@ -3982,17 +3982,17 @@
   </p:cSld>
   <p:clrMap bg1="lt1" tx1="dk1" bg2="lt2" tx2="dk2" accent1="accent1" accent2="accent2" accent3="accent3" accent4="accent4" accent5="accent5" accent6="accent6" hlink="hlink" folHlink="folHlink"/>
   <p:sldLayoutIdLst>
-    <p:sldLayoutId xmlns:r="http://schemas.openxmlformats.org/officeDocument/2006/relationships" id="2147483649" r:id="Rc3c657250af24c6c"/>
-    <p:sldLayoutId xmlns:r="http://schemas.openxmlformats.org/officeDocument/2006/relationships" id="2147483650" r:id="R87c7f7386ce34988"/>
-    <p:sldLayoutId xmlns:r="http://schemas.openxmlformats.org/officeDocument/2006/relationships" id="2147483651" r:id="R885cb276542b4bd6"/>
-    <p:sldLayoutId xmlns:r="http://schemas.openxmlformats.org/officeDocument/2006/relationships" id="2147483652" r:id="R5f847cc1978c4bc1"/>
-    <p:sldLayoutId xmlns:r="http://schemas.openxmlformats.org/officeDocument/2006/relationships" id="2147483653" r:id="R96b42a3dbc284480"/>
-    <p:sldLayoutId xmlns:r="http://schemas.openxmlformats.org/officeDocument/2006/relationships" id="2147483654" r:id="R5b529fbc918648ed"/>
-    <p:sldLayoutId xmlns:r="http://schemas.openxmlformats.org/officeDocument/2006/relationships" id="2147483655" r:id="R2216a3e19c0f422f"/>
-    <p:sldLayoutId xmlns:r="http://schemas.openxmlformats.org/officeDocument/2006/relationships" id="2147483656" r:id="R2f3a5335dcc645b5"/>
-    <p:sldLayoutId xmlns:r="http://schemas.openxmlformats.org/officeDocument/2006/relationships" id="2147483657" r:id="R83a439038cfb440e"/>
-    <p:sldLayoutId xmlns:r="http://schemas.openxmlformats.org/officeDocument/2006/relationships" id="2147483658" r:id="R746f1b33152544f6"/>
-    <p:sldLayoutId xmlns:r="http://schemas.openxmlformats.org/officeDocument/2006/relationships" id="2147483659" r:id="R24fdb42e53174a85"/>
+    <p:sldLayoutId xmlns:r="http://schemas.openxmlformats.org/officeDocument/2006/relationships" id="2147483649" r:id="Rbcce3d5237844e71"/>
+    <p:sldLayoutId xmlns:r="http://schemas.openxmlformats.org/officeDocument/2006/relationships" id="2147483650" r:id="Rb81f96e660f64f52"/>
+    <p:sldLayoutId xmlns:r="http://schemas.openxmlformats.org/officeDocument/2006/relationships" id="2147483651" r:id="R5c8ae14c484e436e"/>
+    <p:sldLayoutId xmlns:r="http://schemas.openxmlformats.org/officeDocument/2006/relationships" id="2147483652" r:id="Rb405db6a372b410c"/>
+    <p:sldLayoutId xmlns:r="http://schemas.openxmlformats.org/officeDocument/2006/relationships" id="2147483653" r:id="R7f3c410635f64207"/>
+    <p:sldLayoutId xmlns:r="http://schemas.openxmlformats.org/officeDocument/2006/relationships" id="2147483654" r:id="R99f913f97c5f4f9e"/>
+    <p:sldLayoutId xmlns:r="http://schemas.openxmlformats.org/officeDocument/2006/relationships" id="2147483655" r:id="R5f75565c013046ca"/>
+    <p:sldLayoutId xmlns:r="http://schemas.openxmlformats.org/officeDocument/2006/relationships" id="2147483656" r:id="Ree3b3612ce1f47e2"/>
+    <p:sldLayoutId xmlns:r="http://schemas.openxmlformats.org/officeDocument/2006/relationships" id="2147483657" r:id="R6db85ee4af7d4c96"/>
+    <p:sldLayoutId xmlns:r="http://schemas.openxmlformats.org/officeDocument/2006/relationships" id="2147483658" r:id="Rc0ce2c986a8b4c78"/>
+    <p:sldLayoutId xmlns:r="http://schemas.openxmlformats.org/officeDocument/2006/relationships" id="2147483659" r:id="Rde92dcfe45a046cd"/>
   </p:sldLayoutIdLst>
   <p:hf hdr="0" ftr="0" dt="0"/>
   <p:txStyles>
@@ -7555,7 +7555,7 @@
                 <a:ea typeface="Calibri"/>
                 <a:cs typeface="Calibri"/>
               </a:rPr>
-              <a:t>Ask for an item to insert at position 1, then ask for an existing item to remove. Display the </a:t>
+              <a:t>Ask for an item and store it in [new_item], then insert it at position 1. Display the </a:t>
             </a:r>
             <a:r>
               <a:rPr sz="2400" b="0">
@@ -7577,7 +7577,73 @@
                 <a:ea typeface="Calibri"/>
                 <a:cs typeface="Calibri"/>
               </a:rPr>
-              <a:t> after each operation. Test map then coat.</a:t>
+              <a:t> after the insertion. Ask for an existing item and store it in [old_item], then remove it and display the </a:t>
+            </a:r>
+            <a:r>
+              <a:rPr sz="2400" b="0">
+                <a:solidFill>
+                  <a:srgbClr val="1750EB"/>
+                </a:solidFill>
+                <a:latin typeface="JetBrains Mono"/>
+                <a:ea typeface="JetBrains Mono"/>
+                <a:cs typeface="JetBrains Mono"/>
+              </a:rPr>
+              <a:t>list</a:t>
+            </a:r>
+            <a:r>
+              <a:rPr sz="2400" b="0">
+                <a:solidFill>
+                  <a:srgbClr val="080808"/>
+                </a:solidFill>
+                <a:latin typeface="Calibri"/>
+                <a:ea typeface="Calibri"/>
+                <a:cs typeface="Calibri"/>
+              </a:rPr>
+              <a:t> again. Test </a:t>
+            </a:r>
+            <a:r>
+              <a:rPr sz="2400" b="0">
+                <a:solidFill>
+                  <a:srgbClr val="067D17"/>
+                </a:solidFill>
+                <a:latin typeface="JetBrains Mono"/>
+                <a:ea typeface="JetBrains Mono"/>
+                <a:cs typeface="JetBrains Mono"/>
+              </a:rPr>
+              <a:t>"map"</a:t>
+            </a:r>
+            <a:r>
+              <a:rPr sz="2400" b="0">
+                <a:solidFill>
+                  <a:srgbClr val="080808"/>
+                </a:solidFill>
+                <a:latin typeface="Calibri"/>
+                <a:ea typeface="Calibri"/>
+                <a:cs typeface="Calibri"/>
+              </a:rPr>
+              <a:t> followed by </a:t>
+            </a:r>
+            <a:r>
+              <a:rPr sz="2400" b="0">
+                <a:solidFill>
+                  <a:srgbClr val="067D17"/>
+                </a:solidFill>
+                <a:latin typeface="JetBrains Mono"/>
+                <a:ea typeface="JetBrains Mono"/>
+                <a:cs typeface="JetBrains Mono"/>
+              </a:rPr>
+              <a:t>"coat"</a:t>
+            </a:r>
+            <a:r>
+              <a:rPr sz="2400" b="0">
+                <a:solidFill>
+                  <a:srgbClr val="080808"/>
+                </a:solidFill>
+                <a:latin typeface="Calibri"/>
+                <a:ea typeface="Calibri"/>
+                <a:cs typeface="Calibri"/>
+              </a:rPr>
+              <a:t>.</a:t>
             </a:r>
           </a:p>
         </p:txBody>
@@ -8150,7 +8216,7 @@
         </p:spPr>
         <p:txBody>
           <a:bodyPr xmlns:a="http://schemas.openxmlformats.org/drawingml/2006/main">
-            <a:normAutofit fontScale="100000"/>
+            <a:normAutofit fontScale="86945"/>
           </a:bodyPr>
           <a:lstStyle xmlns:a="http://schemas.openxmlformats.org/drawingml/2006/main"/>
           <a:p xmlns:a="http://schemas.openxmlformats.org/drawingml/2006/main">
@@ -8169,18 +8235,18 @@
                 <a:ea typeface="Calibri"/>
                 <a:cs typeface="Calibri"/>
               </a:rPr>
-              <a:t>Create a four-name running order editor. Insert a reserve at a user-chosen valid position, remove one known existing name by value, and display the final order one name per line using a </a:t>
+              <a:t>Store </a:t>
             </a:r>
             <a:r>
               <a:rPr sz="2400" b="0">
                 <a:solidFill>
-                  <a:srgbClr val="1750EB"/>
-                </a:solidFill>
-                <a:latin typeface="JetBrains Mono"/>
-                <a:ea typeface="JetBrains Mono"/>
-                <a:cs typeface="JetBrains Mono"/>
-              </a:rPr>
-              <a:t>for</a:t>
+                  <a:srgbClr val="067D17"/>
+                </a:solidFill>
+                <a:latin typeface="JetBrains Mono"/>
+                <a:ea typeface="JetBrains Mono"/>
+                <a:cs typeface="JetBrains Mono"/>
+              </a:rPr>
+              <a:t>"Ari"</a:t>
             </a:r>
             <a:r>
               <a:rPr sz="2400" b="0">
@@ -8191,7 +8257,139 @@
                 <a:ea typeface="Calibri"/>
                 <a:cs typeface="Calibri"/>
               </a:rPr>
-              <a:t> loop.</a:t>
+              <a:t>, </a:t>
+            </a:r>
+            <a:r>
+              <a:rPr sz="2400" b="0">
+                <a:solidFill>
+                  <a:srgbClr val="067D17"/>
+                </a:solidFill>
+                <a:latin typeface="JetBrains Mono"/>
+                <a:ea typeface="JetBrains Mono"/>
+                <a:cs typeface="JetBrains Mono"/>
+              </a:rPr>
+              <a:t>"Bao"</a:t>
+            </a:r>
+            <a:r>
+              <a:rPr sz="2400" b="0">
+                <a:solidFill>
+                  <a:srgbClr val="080808"/>
+                </a:solidFill>
+                <a:latin typeface="Calibri"/>
+                <a:ea typeface="Calibri"/>
+                <a:cs typeface="Calibri"/>
+              </a:rPr>
+              <a:t>, </a:t>
+            </a:r>
+            <a:r>
+              <a:rPr sz="2400" b="0">
+                <a:solidFill>
+                  <a:srgbClr val="067D17"/>
+                </a:solidFill>
+                <a:latin typeface="JetBrains Mono"/>
+                <a:ea typeface="JetBrains Mono"/>
+                <a:cs typeface="JetBrains Mono"/>
+              </a:rPr>
+              <a:t>"Cleo"</a:t>
+            </a:r>
+            <a:r>
+              <a:rPr sz="2400" b="0">
+                <a:solidFill>
+                  <a:srgbClr val="080808"/>
+                </a:solidFill>
+                <a:latin typeface="Calibri"/>
+                <a:ea typeface="Calibri"/>
+                <a:cs typeface="Calibri"/>
+              </a:rPr>
+              <a:t> and </a:t>
+            </a:r>
+            <a:r>
+              <a:rPr sz="2400" b="0">
+                <a:solidFill>
+                  <a:srgbClr val="067D17"/>
+                </a:solidFill>
+                <a:latin typeface="JetBrains Mono"/>
+                <a:ea typeface="JetBrains Mono"/>
+                <a:cs typeface="JetBrains Mono"/>
+              </a:rPr>
+              <a:t>"Dara"</a:t>
+            </a:r>
+            <a:r>
+              <a:rPr sz="2400" b="0">
+                <a:solidFill>
+                  <a:srgbClr val="080808"/>
+                </a:solidFill>
+                <a:latin typeface="Calibri"/>
+                <a:ea typeface="Calibri"/>
+                <a:cs typeface="Calibri"/>
+              </a:rPr>
+              <a:t> in [runners]. Ask for an insertion position from 0 to 4 and store it in [position]. Ask for a reserve name and store it in [reserve], then insert it at [position]. Ask for an existing name and store it in [leaving], then remove it. Use a </a:t>
+            </a:r>
+            <a:r>
+              <a:rPr sz="2400" b="0">
+                <a:solidFill>
+                  <a:srgbClr val="1750EB"/>
+                </a:solidFill>
+                <a:latin typeface="JetBrains Mono"/>
+                <a:ea typeface="JetBrains Mono"/>
+                <a:cs typeface="JetBrains Mono"/>
+              </a:rPr>
+              <a:t>for</a:t>
+            </a:r>
+            <a:r>
+              <a:rPr sz="2400" b="0">
+                <a:solidFill>
+                  <a:srgbClr val="080808"/>
+                </a:solidFill>
+                <a:latin typeface="Calibri"/>
+                <a:ea typeface="Calibri"/>
+                <a:cs typeface="Calibri"/>
+              </a:rPr>
+              <a:t> loop to display each remaining name. Test position 1, reserve </a:t>
+            </a:r>
+            <a:r>
+              <a:rPr sz="2400" b="0">
+                <a:solidFill>
+                  <a:srgbClr val="067D17"/>
+                </a:solidFill>
+                <a:latin typeface="JetBrains Mono"/>
+                <a:ea typeface="JetBrains Mono"/>
+                <a:cs typeface="JetBrains Mono"/>
+              </a:rPr>
+              <a:t>"Eli"</a:t>
+            </a:r>
+            <a:r>
+              <a:rPr sz="2400" b="0">
+                <a:solidFill>
+                  <a:srgbClr val="080808"/>
+                </a:solidFill>
+                <a:latin typeface="Calibri"/>
+                <a:ea typeface="Calibri"/>
+                <a:cs typeface="Calibri"/>
+              </a:rPr>
+              <a:t> and leaving name </a:t>
+            </a:r>
+            <a:r>
+              <a:rPr sz="2400" b="0">
+                <a:solidFill>
+                  <a:srgbClr val="067D17"/>
+                </a:solidFill>
+                <a:latin typeface="JetBrains Mono"/>
+                <a:ea typeface="JetBrains Mono"/>
+                <a:cs typeface="JetBrains Mono"/>
+              </a:rPr>
+              <a:t>"Bao"</a:t>
+            </a:r>
+            <a:r>
+              <a:rPr sz="2400" b="0">
+                <a:solidFill>
+                  <a:srgbClr val="080808"/>
+                </a:solidFill>
+                <a:latin typeface="Calibri"/>
+                <a:ea typeface="Calibri"/>
+                <a:cs typeface="Calibri"/>
+              </a:rPr>
+              <a:t>; display Ari, Eli, Cleo and Dara on separate lines.</a:t>
             </a:r>
           </a:p>
         </p:txBody>

--- a/Mapped Curriculum Lessons/Grade 7/Lesson 23 - Inserting and Removing List Items/Inserting and Removing List Items - Slides.pptx
+++ b/Mapped Curriculum Lessons/Grade 7/Lesson 23 - Inserting and Removing List Items/Inserting and Removing List Items - Slides.pptx
@@ -2,28 +2,28 @@
 <file path=ppt/presentation.xml><?xml version="1.0" encoding="utf-8"?>
 <p:presentation xmlns:p="http://schemas.openxmlformats.org/presentationml/2006/main" embedTrueTypeFonts="1" saveSubsetFonts="0">
   <p:sldMasterIdLst>
-    <p:sldMasterId xmlns:r="http://schemas.openxmlformats.org/officeDocument/2006/relationships" id="2147483648" r:id="R6f2ba610678c4901"/>
+    <p:sldMasterId xmlns:r="http://schemas.openxmlformats.org/officeDocument/2006/relationships" id="2147483648" r:id="R17ca8491ddf14327"/>
   </p:sldMasterIdLst>
   <p:notesMasterIdLst>
-    <p:notesMasterId xmlns:r="http://schemas.openxmlformats.org/officeDocument/2006/relationships" r:id="Rb15933d97dbd431e"/>
+    <p:notesMasterId xmlns:r="http://schemas.openxmlformats.org/officeDocument/2006/relationships" r:id="R1514d91b9c754b01"/>
   </p:notesMasterIdLst>
   <p:sldIdLst>
-    <p:sldId xmlns:r="http://schemas.openxmlformats.org/officeDocument/2006/relationships" id="256" r:id="R8ef0ea71653e42bc"/>
-    <p:sldId xmlns:r="http://schemas.openxmlformats.org/officeDocument/2006/relationships" id="257" r:id="R1023e3c2bde143b3"/>
-    <p:sldId xmlns:r="http://schemas.openxmlformats.org/officeDocument/2006/relationships" id="258" r:id="R244bd2abaf5c4a53"/>
-    <p:sldId xmlns:r="http://schemas.openxmlformats.org/officeDocument/2006/relationships" id="259" r:id="R4251c52a78484a38"/>
-    <p:sldId xmlns:r="http://schemas.openxmlformats.org/officeDocument/2006/relationships" id="260" r:id="Rf390d4cc8744464d"/>
-    <p:sldId xmlns:r="http://schemas.openxmlformats.org/officeDocument/2006/relationships" id="261" r:id="R8e24ef696be6453f"/>
-    <p:sldId xmlns:r="http://schemas.openxmlformats.org/officeDocument/2006/relationships" id="262" r:id="R29581d9ec14444e6"/>
-    <p:sldId xmlns:r="http://schemas.openxmlformats.org/officeDocument/2006/relationships" id="263" r:id="R82abb0f9530249a9"/>
-    <p:sldId xmlns:r="http://schemas.openxmlformats.org/officeDocument/2006/relationships" id="264" r:id="R6c6ccad4c7c54edf"/>
+    <p:sldId xmlns:r="http://schemas.openxmlformats.org/officeDocument/2006/relationships" id="256" r:id="Re376e4cfd31b4cd6"/>
+    <p:sldId xmlns:r="http://schemas.openxmlformats.org/officeDocument/2006/relationships" id="257" r:id="R8e249730a70c4073"/>
+    <p:sldId xmlns:r="http://schemas.openxmlformats.org/officeDocument/2006/relationships" id="258" r:id="R41de30f67c1b43c8"/>
+    <p:sldId xmlns:r="http://schemas.openxmlformats.org/officeDocument/2006/relationships" id="259" r:id="Rd6d52bc32a084e6c"/>
+    <p:sldId xmlns:r="http://schemas.openxmlformats.org/officeDocument/2006/relationships" id="260" r:id="R3e4c1bbf8b38477d"/>
+    <p:sldId xmlns:r="http://schemas.openxmlformats.org/officeDocument/2006/relationships" id="261" r:id="R2e38992cc8c34c5a"/>
+    <p:sldId xmlns:r="http://schemas.openxmlformats.org/officeDocument/2006/relationships" id="262" r:id="R10ee6986dee84916"/>
+    <p:sldId xmlns:r="http://schemas.openxmlformats.org/officeDocument/2006/relationships" id="263" r:id="R38d5f459447e45aa"/>
+    <p:sldId xmlns:r="http://schemas.openxmlformats.org/officeDocument/2006/relationships" id="264" r:id="R463fb5706f7842e1"/>
   </p:sldIdLst>
   <p:sldSz cx="12192000" cy="6858000"/>
   <p:notesSz cx="6858000" cy="9144000"/>
   <p:embeddedFontLst>
     <p:embeddedFont>
       <p:font typeface="JetBrains Mono"/>
-      <p:regular xmlns:r="http://schemas.openxmlformats.org/officeDocument/2006/relationships" r:id="Reeb2003548bf406c"/>
+      <p:regular xmlns:r="http://schemas.openxmlformats.org/officeDocument/2006/relationships" r:id="R1d24cff6aed64742"/>
     </p:embeddedFont>
   </p:embeddedFontLst>
 </p:presentation>
@@ -1071,7 +1071,7 @@
           <p:nvPr/>
         </p:nvPicPr>
         <p:blipFill rotWithShape="1">
-          <a:blip xmlns:r="http://schemas.openxmlformats.org/officeDocument/2006/relationships" xmlns:a="http://schemas.openxmlformats.org/drawingml/2006/main" r:embed="R3edbd1f872954c0e"/>
+          <a:blip xmlns:r="http://schemas.openxmlformats.org/officeDocument/2006/relationships" xmlns:a="http://schemas.openxmlformats.org/drawingml/2006/main" r:embed="Rd695be3e910c473d"/>
           <a:stretch xmlns:a="http://schemas.openxmlformats.org/drawingml/2006/main"/>
         </p:blipFill>
         <p:spPr>
@@ -1451,7 +1451,7 @@
           <p:nvPr/>
         </p:nvPicPr>
         <p:blipFill rotWithShape="1">
-          <a:blip xmlns:r="http://schemas.openxmlformats.org/officeDocument/2006/relationships" xmlns:a="http://schemas.openxmlformats.org/drawingml/2006/main" r:embed="R7babdbe5dfe2423a">
+          <a:blip xmlns:r="http://schemas.openxmlformats.org/officeDocument/2006/relationships" xmlns:a="http://schemas.openxmlformats.org/drawingml/2006/main" r:embed="R9fd7dac5ea8843dd">
             <a:alphaModFix amt="28000"/>
           </a:blip>
           <a:stretch xmlns:a="http://schemas.openxmlformats.org/drawingml/2006/main"/>
@@ -1664,7 +1664,7 @@
           <p:nvPr/>
         </p:nvPicPr>
         <p:blipFill rotWithShape="1">
-          <a:blip xmlns:r="http://schemas.openxmlformats.org/officeDocument/2006/relationships" xmlns:a="http://schemas.openxmlformats.org/drawingml/2006/main" r:embed="R057df974703243a5">
+          <a:blip xmlns:r="http://schemas.openxmlformats.org/officeDocument/2006/relationships" xmlns:a="http://schemas.openxmlformats.org/drawingml/2006/main" r:embed="R0aa7abfa3a2e4c28">
             <a:alphaModFix amt="28000"/>
           </a:blip>
           <a:stretch xmlns:a="http://schemas.openxmlformats.org/drawingml/2006/main"/>
@@ -1899,7 +1899,7 @@
           <p:nvPr/>
         </p:nvPicPr>
         <p:blipFill rotWithShape="1">
-          <a:blip xmlns:r="http://schemas.openxmlformats.org/officeDocument/2006/relationships" xmlns:a="http://schemas.openxmlformats.org/drawingml/2006/main" r:embed="R4717e41a7e3e4dc8">
+          <a:blip xmlns:r="http://schemas.openxmlformats.org/officeDocument/2006/relationships" xmlns:a="http://schemas.openxmlformats.org/drawingml/2006/main" r:embed="Red58d7bba6fb43e7">
             <a:alphaModFix amt="28000"/>
           </a:blip>
           <a:stretch xmlns:a="http://schemas.openxmlformats.org/drawingml/2006/main"/>
@@ -2176,7 +2176,7 @@
           <p:nvPr/>
         </p:nvPicPr>
         <p:blipFill rotWithShape="1">
-          <a:blip xmlns:r="http://schemas.openxmlformats.org/officeDocument/2006/relationships" xmlns:a="http://schemas.openxmlformats.org/drawingml/2006/main" r:embed="R67184a941aca4cff">
+          <a:blip xmlns:r="http://schemas.openxmlformats.org/officeDocument/2006/relationships" xmlns:a="http://schemas.openxmlformats.org/drawingml/2006/main" r:embed="Rf3a24ac5ba39441b">
             <a:alphaModFix amt="28000"/>
           </a:blip>
           <a:stretch xmlns:a="http://schemas.openxmlformats.org/drawingml/2006/main"/>
@@ -2451,7 +2451,7 @@
           <p:nvPr/>
         </p:nvPicPr>
         <p:blipFill rotWithShape="1">
-          <a:blip xmlns:r="http://schemas.openxmlformats.org/officeDocument/2006/relationships" xmlns:a="http://schemas.openxmlformats.org/drawingml/2006/main" r:embed="R0caa9f905d0b4a2c">
+          <a:blip xmlns:r="http://schemas.openxmlformats.org/officeDocument/2006/relationships" xmlns:a="http://schemas.openxmlformats.org/drawingml/2006/main" r:embed="Rfe07128260394637">
             <a:alphaModFix amt="28000"/>
           </a:blip>
           <a:stretch xmlns:a="http://schemas.openxmlformats.org/drawingml/2006/main"/>
@@ -2875,7 +2875,7 @@
           <p:nvPr/>
         </p:nvPicPr>
         <p:blipFill rotWithShape="1">
-          <a:blip xmlns:r="http://schemas.openxmlformats.org/officeDocument/2006/relationships" xmlns:a="http://schemas.openxmlformats.org/drawingml/2006/main" r:embed="Rcd30dcded04d4a93">
+          <a:blip xmlns:r="http://schemas.openxmlformats.org/officeDocument/2006/relationships" xmlns:a="http://schemas.openxmlformats.org/drawingml/2006/main" r:embed="R07b43ceaeb0c42ef">
             <a:alphaModFix amt="28000"/>
           </a:blip>
           <a:stretch xmlns:a="http://schemas.openxmlformats.org/drawingml/2006/main"/>
@@ -3016,7 +3016,7 @@
           <p:nvPr/>
         </p:nvPicPr>
         <p:blipFill rotWithShape="1">
-          <a:blip xmlns:r="http://schemas.openxmlformats.org/officeDocument/2006/relationships" xmlns:a="http://schemas.openxmlformats.org/drawingml/2006/main" r:embed="R4e966e720ce145c0">
+          <a:blip xmlns:r="http://schemas.openxmlformats.org/officeDocument/2006/relationships" xmlns:a="http://schemas.openxmlformats.org/drawingml/2006/main" r:embed="R62bd4968a89c4532">
             <a:alphaModFix amt="28000"/>
           </a:blip>
           <a:stretch xmlns:a="http://schemas.openxmlformats.org/drawingml/2006/main"/>
@@ -3130,7 +3130,7 @@
           <p:nvPr/>
         </p:nvPicPr>
         <p:blipFill rotWithShape="1">
-          <a:blip xmlns:r="http://schemas.openxmlformats.org/officeDocument/2006/relationships" xmlns:a="http://schemas.openxmlformats.org/drawingml/2006/main" r:embed="R96a905a764a249fd">
+          <a:blip xmlns:r="http://schemas.openxmlformats.org/officeDocument/2006/relationships" xmlns:a="http://schemas.openxmlformats.org/drawingml/2006/main" r:embed="Rdaabcc0feede4680">
             <a:alphaModFix amt="28000"/>
           </a:blip>
           <a:stretch xmlns:a="http://schemas.openxmlformats.org/drawingml/2006/main"/>
@@ -3457,7 +3457,7 @@
           <p:nvPr/>
         </p:nvPicPr>
         <p:blipFill rotWithShape="1">
-          <a:blip xmlns:r="http://schemas.openxmlformats.org/officeDocument/2006/relationships" xmlns:a="http://schemas.openxmlformats.org/drawingml/2006/main" r:embed="Rbd3a29132b1d461d">
+          <a:blip xmlns:r="http://schemas.openxmlformats.org/officeDocument/2006/relationships" xmlns:a="http://schemas.openxmlformats.org/drawingml/2006/main" r:embed="R6eeb6600588c410d">
             <a:alphaModFix amt="28000"/>
           </a:blip>
           <a:stretch xmlns:a="http://schemas.openxmlformats.org/drawingml/2006/main"/>
@@ -3745,7 +3745,7 @@
           <p:nvPr/>
         </p:nvPicPr>
         <p:blipFill rotWithShape="1">
-          <a:blip xmlns:r="http://schemas.openxmlformats.org/officeDocument/2006/relationships" xmlns:a="http://schemas.openxmlformats.org/drawingml/2006/main" r:embed="R7ccf1cb2ee7c414b">
+          <a:blip xmlns:r="http://schemas.openxmlformats.org/officeDocument/2006/relationships" xmlns:a="http://schemas.openxmlformats.org/drawingml/2006/main" r:embed="R98f543c332764046">
             <a:alphaModFix amt="28000"/>
           </a:blip>
           <a:stretch xmlns:a="http://schemas.openxmlformats.org/drawingml/2006/main"/>
@@ -3982,17 +3982,17 @@
   </p:cSld>
   <p:clrMap bg1="lt1" tx1="dk1" bg2="lt2" tx2="dk2" accent1="accent1" accent2="accent2" accent3="accent3" accent4="accent4" accent5="accent5" accent6="accent6" hlink="hlink" folHlink="folHlink"/>
   <p:sldLayoutIdLst>
-    <p:sldLayoutId xmlns:r="http://schemas.openxmlformats.org/officeDocument/2006/relationships" id="2147483649" r:id="Rbcce3d5237844e71"/>
-    <p:sldLayoutId xmlns:r="http://schemas.openxmlformats.org/officeDocument/2006/relationships" id="2147483650" r:id="Rb81f96e660f64f52"/>
-    <p:sldLayoutId xmlns:r="http://schemas.openxmlformats.org/officeDocument/2006/relationships" id="2147483651" r:id="R5c8ae14c484e436e"/>
-    <p:sldLayoutId xmlns:r="http://schemas.openxmlformats.org/officeDocument/2006/relationships" id="2147483652" r:id="Rb405db6a372b410c"/>
-    <p:sldLayoutId xmlns:r="http://schemas.openxmlformats.org/officeDocument/2006/relationships" id="2147483653" r:id="R7f3c410635f64207"/>
-    <p:sldLayoutId xmlns:r="http://schemas.openxmlformats.org/officeDocument/2006/relationships" id="2147483654" r:id="R99f913f97c5f4f9e"/>
-    <p:sldLayoutId xmlns:r="http://schemas.openxmlformats.org/officeDocument/2006/relationships" id="2147483655" r:id="R5f75565c013046ca"/>
-    <p:sldLayoutId xmlns:r="http://schemas.openxmlformats.org/officeDocument/2006/relationships" id="2147483656" r:id="Ree3b3612ce1f47e2"/>
-    <p:sldLayoutId xmlns:r="http://schemas.openxmlformats.org/officeDocument/2006/relationships" id="2147483657" r:id="R6db85ee4af7d4c96"/>
-    <p:sldLayoutId xmlns:r="http://schemas.openxmlformats.org/officeDocument/2006/relationships" id="2147483658" r:id="Rc0ce2c986a8b4c78"/>
-    <p:sldLayoutId xmlns:r="http://schemas.openxmlformats.org/officeDocument/2006/relationships" id="2147483659" r:id="Rde92dcfe45a046cd"/>
+    <p:sldLayoutId xmlns:r="http://schemas.openxmlformats.org/officeDocument/2006/relationships" id="2147483649" r:id="R379b8585ccc04534"/>
+    <p:sldLayoutId xmlns:r="http://schemas.openxmlformats.org/officeDocument/2006/relationships" id="2147483650" r:id="R659f090e8a67494a"/>
+    <p:sldLayoutId xmlns:r="http://schemas.openxmlformats.org/officeDocument/2006/relationships" id="2147483651" r:id="R85b34a98cdb24f29"/>
+    <p:sldLayoutId xmlns:r="http://schemas.openxmlformats.org/officeDocument/2006/relationships" id="2147483652" r:id="Red6809fe1726429f"/>
+    <p:sldLayoutId xmlns:r="http://schemas.openxmlformats.org/officeDocument/2006/relationships" id="2147483653" r:id="Rf2d13f1480de4515"/>
+    <p:sldLayoutId xmlns:r="http://schemas.openxmlformats.org/officeDocument/2006/relationships" id="2147483654" r:id="R51660da3e31c4b14"/>
+    <p:sldLayoutId xmlns:r="http://schemas.openxmlformats.org/officeDocument/2006/relationships" id="2147483655" r:id="R28df60e6e4364bab"/>
+    <p:sldLayoutId xmlns:r="http://schemas.openxmlformats.org/officeDocument/2006/relationships" id="2147483656" r:id="Rf30bf3eb688b45d3"/>
+    <p:sldLayoutId xmlns:r="http://schemas.openxmlformats.org/officeDocument/2006/relationships" id="2147483657" r:id="R0538f8c527774db1"/>
+    <p:sldLayoutId xmlns:r="http://schemas.openxmlformats.org/officeDocument/2006/relationships" id="2147483658" r:id="R1bd217621c0b447e"/>
+    <p:sldLayoutId xmlns:r="http://schemas.openxmlformats.org/officeDocument/2006/relationships" id="2147483659" r:id="Ra37e6123bbf24c94"/>
   </p:sldLayoutIdLst>
   <p:hf hdr="0" ftr="0" dt="0"/>
   <p:txStyles>
@@ -6941,18 +6941,18 @@
                 <a:ea typeface="Calibri"/>
                 <a:cs typeface="Calibri"/>
               </a:rPr>
-              <a:t>Insert </a:t>
-            </a:r>
-            <a:r>
-              <a:rPr sz="2400" b="0">
-                <a:solidFill>
-                  <a:srgbClr val="067D17"/>
-                </a:solidFill>
-                <a:latin typeface="JetBrains Mono"/>
-                <a:ea typeface="JetBrains Mono"/>
-                <a:cs typeface="JetBrains Mono"/>
-              </a:rPr>
-              <a:t>"snack"</a:t>
+              <a:t>Change the example so the torch is moved to the front after packing. Use </a:t>
+            </a:r>
+            <a:r>
+              <a:rPr sz="2050" b="0">
+                <a:solidFill>
+                  <a:srgbClr val="1750EB"/>
+                </a:solidFill>
+                <a:latin typeface="JetBrains Mono"/>
+                <a:ea typeface="JetBrains Mono"/>
+                <a:cs typeface="JetBrains Mono"/>
+              </a:rPr>
+              <a:t>remove()</a:t>
             </a:r>
             <a:r>
               <a:rPr sz="2400" b="0">
@@ -6963,7 +6963,73 @@
                 <a:ea typeface="Calibri"/>
                 <a:cs typeface="Calibri"/>
               </a:rPr>
-              <a:t> at position 2 and keep the removal of coat. The final order must be water, snack, torch.</a:t>
+              <a:t> to take out </a:t>
+            </a:r>
+            <a:r>
+              <a:rPr sz="2050" b="0">
+                <a:solidFill>
+                  <a:srgbClr val="067D17"/>
+                </a:solidFill>
+                <a:latin typeface="JetBrains Mono"/>
+                <a:ea typeface="JetBrains Mono"/>
+                <a:cs typeface="JetBrains Mono"/>
+              </a:rPr>
+              <a:t>"torch"</a:t>
+            </a:r>
+            <a:r>
+              <a:rPr sz="2400" b="0">
+                <a:solidFill>
+                  <a:srgbClr val="080808"/>
+                </a:solidFill>
+                <a:latin typeface="Calibri"/>
+                <a:ea typeface="Calibri"/>
+                <a:cs typeface="Calibri"/>
+              </a:rPr>
+              <a:t>, then </a:t>
+            </a:r>
+            <a:r>
+              <a:rPr sz="2050" b="0">
+                <a:solidFill>
+                  <a:srgbClr val="1750EB"/>
+                </a:solidFill>
+                <a:latin typeface="JetBrains Mono"/>
+                <a:ea typeface="JetBrains Mono"/>
+                <a:cs typeface="JetBrains Mono"/>
+              </a:rPr>
+              <a:t>insert()</a:t>
+            </a:r>
+            <a:r>
+              <a:rPr sz="2400" b="0">
+                <a:solidFill>
+                  <a:srgbClr val="080808"/>
+                </a:solidFill>
+                <a:latin typeface="Calibri"/>
+                <a:ea typeface="Calibri"/>
+                <a:cs typeface="Calibri"/>
+              </a:rPr>
+              <a:t> to put it at position 0. The final line should be </a:t>
+            </a:r>
+            <a:r>
+              <a:rPr sz="2050" b="0">
+                <a:solidFill>
+                  <a:srgbClr val="067D17"/>
+                </a:solidFill>
+                <a:latin typeface="JetBrains Mono"/>
+                <a:ea typeface="JetBrains Mono"/>
+                <a:cs typeface="JetBrains Mono"/>
+              </a:rPr>
+              <a:t>"Packed kit: ['torch', 'map', 'water']"</a:t>
+            </a:r>
+            <a:r>
+              <a:rPr sz="2400" b="0">
+                <a:solidFill>
+                  <a:srgbClr val="080808"/>
+                </a:solidFill>
+                <a:latin typeface="Calibri"/>
+                <a:ea typeface="Calibri"/>
+                <a:cs typeface="Calibri"/>
+              </a:rPr>
+              <a:t>.</a:t>
             </a:r>
           </a:p>
         </p:txBody>
@@ -7555,18 +7621,21 @@
                 <a:ea typeface="Calibri"/>
                 <a:cs typeface="Calibri"/>
               </a:rPr>
-              <a:t>Ask for an item and store it in [new_item], then insert it at position 1. Display the </a:t>
-            </a:r>
-            <a:r>
-              <a:rPr sz="2400" b="0">
-                <a:solidFill>
-                  <a:srgbClr val="1750EB"/>
-                </a:solidFill>
-                <a:latin typeface="JetBrains Mono"/>
-                <a:ea typeface="JetBrains Mono"/>
-                <a:cs typeface="JetBrains Mono"/>
-              </a:rPr>
-              <a:t>list</a:t>
+              <a:t>Change the example so the user chooses both changes. Ask for </a:t>
+            </a:r>
+            <a:r>
+              <a:rPr sz="2050" b="0">
+                <a:solidFill>
+                  <a:srgbClr val="6A1B9A"/>
+                </a:solidFill>
+                <a:highlight>
+                  <a:srgbClr val="ECEAF4"/>
+                </a:highlight>
+                <a:latin typeface="JetBrains Mono"/>
+                <a:ea typeface="JetBrains Mono"/>
+                <a:cs typeface="JetBrains Mono"/>
+              </a:rPr>
+              <a:t> new_item </a:t>
             </a:r>
             <a:r>
               <a:rPr sz="2400" b="0">
@@ -7577,10 +7646,10 @@
                 <a:ea typeface="Calibri"/>
                 <a:cs typeface="Calibri"/>
               </a:rPr>
-              <a:t> after the insertion. Ask for an existing item and store it in [old_item], then remove it and display the </a:t>
-            </a:r>
-            <a:r>
-              <a:rPr sz="2400" b="0">
+              <a:t> and insert it at position 1, then display the </a:t>
+            </a:r>
+            <a:r>
+              <a:rPr sz="2050" b="0">
                 <a:solidFill>
                   <a:srgbClr val="1750EB"/>
                 </a:solidFill>
@@ -7599,18 +7668,21 @@
                 <a:ea typeface="Calibri"/>
                 <a:cs typeface="Calibri"/>
               </a:rPr>
-              <a:t> again. Test </a:t>
-            </a:r>
-            <a:r>
-              <a:rPr sz="2400" b="0">
-                <a:solidFill>
-                  <a:srgbClr val="067D17"/>
-                </a:solidFill>
-                <a:latin typeface="JetBrains Mono"/>
-                <a:ea typeface="JetBrains Mono"/>
-                <a:cs typeface="JetBrains Mono"/>
-              </a:rPr>
-              <a:t>"map"</a:t>
+              <a:t>. Ask for </a:t>
+            </a:r>
+            <a:r>
+              <a:rPr sz="2050" b="0">
+                <a:solidFill>
+                  <a:srgbClr val="6A1B9A"/>
+                </a:solidFill>
+                <a:highlight>
+                  <a:srgbClr val="ECEAF4"/>
+                </a:highlight>
+                <a:latin typeface="JetBrains Mono"/>
+                <a:ea typeface="JetBrains Mono"/>
+                <a:cs typeface="JetBrains Mono"/>
+              </a:rPr>
+              <a:t> old_item </a:t>
             </a:r>
             <a:r>
               <a:rPr sz="2400" b="0">
@@ -7621,18 +7693,18 @@
                 <a:ea typeface="Calibri"/>
                 <a:cs typeface="Calibri"/>
               </a:rPr>
-              <a:t> followed by </a:t>
-            </a:r>
-            <a:r>
-              <a:rPr sz="2400" b="0">
-                <a:solidFill>
-                  <a:srgbClr val="067D17"/>
-                </a:solidFill>
-                <a:latin typeface="JetBrains Mono"/>
-                <a:ea typeface="JetBrains Mono"/>
-                <a:cs typeface="JetBrains Mono"/>
-              </a:rPr>
-              <a:t>"coat"</a:t>
+              <a:t> from the </a:t>
+            </a:r>
+            <a:r>
+              <a:rPr sz="2050" b="0">
+                <a:solidFill>
+                  <a:srgbClr val="1750EB"/>
+                </a:solidFill>
+                <a:latin typeface="JetBrains Mono"/>
+                <a:ea typeface="JetBrains Mono"/>
+                <a:cs typeface="JetBrains Mono"/>
+              </a:rPr>
+              <a:t>list</a:t>
             </a:r>
             <a:r>
               <a:rPr sz="2400" b="0">
@@ -7643,7 +7715,139 @@
                 <a:ea typeface="Calibri"/>
                 <a:cs typeface="Calibri"/>
               </a:rPr>
-              <a:t>.</a:t>
+              <a:t>, remove it and display the </a:t>
+            </a:r>
+            <a:r>
+              <a:rPr sz="2050" b="0">
+                <a:solidFill>
+                  <a:srgbClr val="1750EB"/>
+                </a:solidFill>
+                <a:latin typeface="JetBrains Mono"/>
+                <a:ea typeface="JetBrains Mono"/>
+                <a:cs typeface="JetBrains Mono"/>
+              </a:rPr>
+              <a:t>list</a:t>
+            </a:r>
+            <a:r>
+              <a:rPr sz="2400" b="0">
+                <a:solidFill>
+                  <a:srgbClr val="080808"/>
+                </a:solidFill>
+                <a:latin typeface="Calibri"/>
+                <a:ea typeface="Calibri"/>
+                <a:cs typeface="Calibri"/>
+              </a:rPr>
+              <a:t> again. For example, </a:t>
+            </a:r>
+            <a:r>
+              <a:rPr sz="2050" b="0">
+                <a:solidFill>
+                  <a:srgbClr val="067D17"/>
+                </a:solidFill>
+                <a:latin typeface="JetBrains Mono"/>
+                <a:ea typeface="JetBrains Mono"/>
+                <a:cs typeface="JetBrains Mono"/>
+              </a:rPr>
+              <a:t>"map"</a:t>
+            </a:r>
+            <a:r>
+              <a:rPr sz="2400" b="0">
+                <a:solidFill>
+                  <a:srgbClr val="080808"/>
+                </a:solidFill>
+                <a:latin typeface="Calibri"/>
+                <a:ea typeface="Calibri"/>
+                <a:cs typeface="Calibri"/>
+              </a:rPr>
+              <a:t> then </a:t>
+            </a:r>
+            <a:r>
+              <a:rPr sz="2050" b="0">
+                <a:solidFill>
+                  <a:srgbClr val="067D17"/>
+                </a:solidFill>
+                <a:latin typeface="JetBrains Mono"/>
+                <a:ea typeface="JetBrains Mono"/>
+                <a:cs typeface="JetBrains Mono"/>
+              </a:rPr>
+              <a:t>"coat"</a:t>
+            </a:r>
+            <a:r>
+              <a:rPr sz="2400" b="0">
+                <a:solidFill>
+                  <a:srgbClr val="080808"/>
+                </a:solidFill>
+                <a:latin typeface="Calibri"/>
+                <a:ea typeface="Calibri"/>
+                <a:cs typeface="Calibri"/>
+              </a:rPr>
+              <a:t> ends with [</a:t>
+            </a:r>
+            <a:r>
+              <a:rPr sz="2050" b="0">
+                <a:solidFill>
+                  <a:srgbClr val="067D17"/>
+                </a:solidFill>
+                <a:latin typeface="JetBrains Mono"/>
+                <a:ea typeface="JetBrains Mono"/>
+                <a:cs typeface="JetBrains Mono"/>
+              </a:rPr>
+              <a:t>'map'</a:t>
+            </a:r>
+            <a:r>
+              <a:rPr sz="2400" b="0">
+                <a:solidFill>
+                  <a:srgbClr val="080808"/>
+                </a:solidFill>
+                <a:latin typeface="Calibri"/>
+                <a:ea typeface="Calibri"/>
+                <a:cs typeface="Calibri"/>
+              </a:rPr>
+              <a:t>, </a:t>
+            </a:r>
+            <a:r>
+              <a:rPr sz="2050" b="0">
+                <a:solidFill>
+                  <a:srgbClr val="067D17"/>
+                </a:solidFill>
+                <a:latin typeface="JetBrains Mono"/>
+                <a:ea typeface="JetBrains Mono"/>
+                <a:cs typeface="JetBrains Mono"/>
+              </a:rPr>
+              <a:t>'water'</a:t>
+            </a:r>
+            <a:r>
+              <a:rPr sz="2400" b="0">
+                <a:solidFill>
+                  <a:srgbClr val="080808"/>
+                </a:solidFill>
+                <a:latin typeface="Calibri"/>
+                <a:ea typeface="Calibri"/>
+                <a:cs typeface="Calibri"/>
+              </a:rPr>
+              <a:t>, </a:t>
+            </a:r>
+            <a:r>
+              <a:rPr sz="2050" b="0">
+                <a:solidFill>
+                  <a:srgbClr val="067D17"/>
+                </a:solidFill>
+                <a:latin typeface="JetBrains Mono"/>
+                <a:ea typeface="JetBrains Mono"/>
+                <a:cs typeface="JetBrains Mono"/>
+              </a:rPr>
+              <a:t>'torch'</a:t>
+            </a:r>
+            <a:r>
+              <a:rPr sz="2400" b="0">
+                <a:solidFill>
+                  <a:srgbClr val="080808"/>
+                </a:solidFill>
+                <a:latin typeface="Calibri"/>
+                <a:ea typeface="Calibri"/>
+                <a:cs typeface="Calibri"/>
+              </a:rPr>
+              <a:t>].</a:t>
             </a:r>
           </a:p>
         </p:txBody>
@@ -8216,7 +8420,7 @@
         </p:spPr>
         <p:txBody>
           <a:bodyPr xmlns:a="http://schemas.openxmlformats.org/drawingml/2006/main">
-            <a:normAutofit fontScale="86945"/>
+            <a:normAutofit fontScale="100000"/>
           </a:bodyPr>
           <a:lstStyle xmlns:a="http://schemas.openxmlformats.org/drawingml/2006/main"/>
           <a:p xmlns:a="http://schemas.openxmlformats.org/drawingml/2006/main">
@@ -8235,18 +8439,18 @@
                 <a:ea typeface="Calibri"/>
                 <a:cs typeface="Calibri"/>
               </a:rPr>
-              <a:t>Store </a:t>
-            </a:r>
-            <a:r>
-              <a:rPr sz="2400" b="0">
-                <a:solidFill>
-                  <a:srgbClr val="067D17"/>
-                </a:solidFill>
-                <a:latin typeface="JetBrains Mono"/>
-                <a:ea typeface="JetBrains Mono"/>
-                <a:cs typeface="JetBrains Mono"/>
-              </a:rPr>
-              <a:t>"Ari"</a:t>
+              <a:t>Create a </a:t>
+            </a:r>
+            <a:r>
+              <a:rPr sz="2050" b="0">
+                <a:solidFill>
+                  <a:srgbClr val="1750EB"/>
+                </a:solidFill>
+                <a:latin typeface="JetBrains Mono"/>
+                <a:ea typeface="JetBrains Mono"/>
+                <a:cs typeface="JetBrains Mono"/>
+              </a:rPr>
+              <a:t>list</a:t>
             </a:r>
             <a:r>
               <a:rPr sz="2400" b="0">
@@ -8257,18 +8461,21 @@
                 <a:ea typeface="Calibri"/>
                 <a:cs typeface="Calibri"/>
               </a:rPr>
-              <a:t>, </a:t>
-            </a:r>
-            <a:r>
-              <a:rPr sz="2400" b="0">
-                <a:solidFill>
-                  <a:srgbClr val="067D17"/>
-                </a:solidFill>
-                <a:latin typeface="JetBrains Mono"/>
-                <a:ea typeface="JetBrains Mono"/>
-                <a:cs typeface="JetBrains Mono"/>
-              </a:rPr>
-              <a:t>"Bao"</a:t>
+              <a:t> called </a:t>
+            </a:r>
+            <a:r>
+              <a:rPr sz="2050" b="0">
+                <a:solidFill>
+                  <a:srgbClr val="6A1B9A"/>
+                </a:solidFill>
+                <a:highlight>
+                  <a:srgbClr val="ECEAF4"/>
+                </a:highlight>
+                <a:latin typeface="JetBrains Mono"/>
+                <a:ea typeface="JetBrains Mono"/>
+                <a:cs typeface="JetBrains Mono"/>
+              </a:rPr>
+              <a:t> runners </a:t>
             </a:r>
             <a:r>
               <a:rPr sz="2400" b="0">
@@ -8279,10 +8486,10 @@
                 <a:ea typeface="Calibri"/>
                 <a:cs typeface="Calibri"/>
               </a:rPr>
-              <a:t>, </a:t>
-            </a:r>
-            <a:r>
-              <a:rPr sz="2400" b="0">
+              <a:t> holding </a:t>
+            </a:r>
+            <a:r>
+              <a:rPr sz="2050" b="0">
                 <a:solidFill>
                   <a:srgbClr val="067D17"/>
                 </a:solidFill>
@@ -8290,7 +8497,7 @@
                 <a:ea typeface="JetBrains Mono"/>
                 <a:cs typeface="JetBrains Mono"/>
               </a:rPr>
-              <a:t>"Cleo"</a:t>
+              <a:t>"Ari"</a:t>
             </a:r>
             <a:r>
               <a:rPr sz="2400" b="0">
@@ -8301,10 +8508,10 @@
                 <a:ea typeface="Calibri"/>
                 <a:cs typeface="Calibri"/>
               </a:rPr>
-              <a:t> and </a:t>
-            </a:r>
-            <a:r>
-              <a:rPr sz="2400" b="0">
+              <a:t>, </a:t>
+            </a:r>
+            <a:r>
+              <a:rPr sz="2050" b="0">
                 <a:solidFill>
                   <a:srgbClr val="067D17"/>
                 </a:solidFill>
@@ -8312,7 +8519,7 @@
                 <a:ea typeface="JetBrains Mono"/>
                 <a:cs typeface="JetBrains Mono"/>
               </a:rPr>
-              <a:t>"Dara"</a:t>
+              <a:t>"Bao"</a:t>
             </a:r>
             <a:r>
               <a:rPr sz="2400" b="0">
@@ -8323,18 +8530,18 @@
                 <a:ea typeface="Calibri"/>
                 <a:cs typeface="Calibri"/>
               </a:rPr>
-              <a:t> in [runners]. Ask for an insertion position from 0 to 4 and store it in [position]. Ask for a reserve name and store it in [reserve], then insert it at [position]. Ask for an existing name and store it in [leaving], then remove it. Use a </a:t>
-            </a:r>
-            <a:r>
-              <a:rPr sz="2400" b="0">
-                <a:solidFill>
-                  <a:srgbClr val="1750EB"/>
-                </a:solidFill>
-                <a:latin typeface="JetBrains Mono"/>
-                <a:ea typeface="JetBrains Mono"/>
-                <a:cs typeface="JetBrains Mono"/>
-              </a:rPr>
-              <a:t>for</a:t>
+              <a:t>, </a:t>
+            </a:r>
+            <a:r>
+              <a:rPr sz="2050" b="0">
+                <a:solidFill>
+                  <a:srgbClr val="067D17"/>
+                </a:solidFill>
+                <a:latin typeface="JetBrains Mono"/>
+                <a:ea typeface="JetBrains Mono"/>
+                <a:cs typeface="JetBrains Mono"/>
+              </a:rPr>
+              <a:t>"Cleo"</a:t>
             </a:r>
             <a:r>
               <a:rPr sz="2400" b="0">
@@ -8345,10 +8552,10 @@
                 <a:ea typeface="Calibri"/>
                 <a:cs typeface="Calibri"/>
               </a:rPr>
-              <a:t> loop to display each remaining name. Test position 1, reserve </a:t>
-            </a:r>
-            <a:r>
-              <a:rPr sz="2400" b="0">
+              <a:t> and </a:t>
+            </a:r>
+            <a:r>
+              <a:rPr sz="2050" b="0">
                 <a:solidFill>
                   <a:srgbClr val="067D17"/>
                 </a:solidFill>
@@ -8356,7 +8563,7 @@
                 <a:ea typeface="JetBrains Mono"/>
                 <a:cs typeface="JetBrains Mono"/>
               </a:rPr>
-              <a:t>"Eli"</a:t>
+              <a:t>"Dara"</a:t>
             </a:r>
             <a:r>
               <a:rPr sz="2400" b="0">
@@ -8367,18 +8574,18 @@
                 <a:ea typeface="Calibri"/>
                 <a:cs typeface="Calibri"/>
               </a:rPr>
-              <a:t> and leaving name </a:t>
-            </a:r>
-            <a:r>
-              <a:rPr sz="2400" b="0">
-                <a:solidFill>
-                  <a:srgbClr val="067D17"/>
-                </a:solidFill>
-                <a:latin typeface="JetBrains Mono"/>
-                <a:ea typeface="JetBrains Mono"/>
-                <a:cs typeface="JetBrains Mono"/>
-              </a:rPr>
-              <a:t>"Bao"</a:t>
+              <a:t>. Ask for a position and a reserve runner to insert there, then ask for a runner to remove. Display the </a:t>
+            </a:r>
+            <a:r>
+              <a:rPr sz="2050" b="0">
+                <a:solidFill>
+                  <a:srgbClr val="1750EB"/>
+                </a:solidFill>
+                <a:latin typeface="JetBrains Mono"/>
+                <a:ea typeface="JetBrains Mono"/>
+                <a:cs typeface="JetBrains Mono"/>
+              </a:rPr>
+              <a:t>list</a:t>
             </a:r>
             <a:r>
               <a:rPr sz="2400" b="0">
@@ -8389,7 +8596,95 @@
                 <a:ea typeface="Calibri"/>
                 <a:cs typeface="Calibri"/>
               </a:rPr>
-              <a:t>; display Ari, Eli, Cleo and Dara on separate lines.</a:t>
+              <a:t> after </a:t>
+            </a:r>
+            <a:r>
+              <a:rPr sz="2050" b="0">
+                <a:solidFill>
+                  <a:srgbClr val="067D17"/>
+                </a:solidFill>
+                <a:latin typeface="JetBrains Mono"/>
+                <a:ea typeface="JetBrains Mono"/>
+                <a:cs typeface="JetBrains Mono"/>
+              </a:rPr>
+              <a:t>"Runners:"</a:t>
+            </a:r>
+            <a:r>
+              <a:rPr sz="2400" b="0">
+                <a:solidFill>
+                  <a:srgbClr val="080808"/>
+                </a:solidFill>
+                <a:latin typeface="Calibri"/>
+                <a:ea typeface="Calibri"/>
+                <a:cs typeface="Calibri"/>
+              </a:rPr>
+              <a:t>. For example, 1, </a:t>
+            </a:r>
+            <a:r>
+              <a:rPr sz="2050" b="0">
+                <a:solidFill>
+                  <a:srgbClr val="067D17"/>
+                </a:solidFill>
+                <a:latin typeface="JetBrains Mono"/>
+                <a:ea typeface="JetBrains Mono"/>
+                <a:cs typeface="JetBrains Mono"/>
+              </a:rPr>
+              <a:t>"Eli"</a:t>
+            </a:r>
+            <a:r>
+              <a:rPr sz="2400" b="0">
+                <a:solidFill>
+                  <a:srgbClr val="080808"/>
+                </a:solidFill>
+                <a:latin typeface="Calibri"/>
+                <a:ea typeface="Calibri"/>
+                <a:cs typeface="Calibri"/>
+              </a:rPr>
+              <a:t> and </a:t>
+            </a:r>
+            <a:r>
+              <a:rPr sz="2050" b="0">
+                <a:solidFill>
+                  <a:srgbClr val="067D17"/>
+                </a:solidFill>
+                <a:latin typeface="JetBrains Mono"/>
+                <a:ea typeface="JetBrains Mono"/>
+                <a:cs typeface="JetBrains Mono"/>
+              </a:rPr>
+              <a:t>"Bao"</a:t>
+            </a:r>
+            <a:r>
+              <a:rPr sz="2400" b="0">
+                <a:solidFill>
+                  <a:srgbClr val="080808"/>
+                </a:solidFill>
+                <a:latin typeface="Calibri"/>
+                <a:ea typeface="Calibri"/>
+                <a:cs typeface="Calibri"/>
+              </a:rPr>
+              <a:t> display </a:t>
+            </a:r>
+            <a:r>
+              <a:rPr sz="2050" b="0">
+                <a:solidFill>
+                  <a:srgbClr val="067D17"/>
+                </a:solidFill>
+                <a:latin typeface="JetBrains Mono"/>
+                <a:ea typeface="JetBrains Mono"/>
+                <a:cs typeface="JetBrains Mono"/>
+              </a:rPr>
+              <a:t>"Runners: ['Ari', 'Eli', 'Cleo', 'Dara']"</a:t>
+            </a:r>
+            <a:r>
+              <a:rPr sz="2400" b="0">
+                <a:solidFill>
+                  <a:srgbClr val="080808"/>
+                </a:solidFill>
+                <a:latin typeface="Calibri"/>
+                <a:ea typeface="Calibri"/>
+                <a:cs typeface="Calibri"/>
+              </a:rPr>
+              <a:t>.</a:t>
             </a:r>
           </a:p>
         </p:txBody>

--- a/Mapped Curriculum Lessons/Grade 7/Lesson 23 - Inserting and Removing List Items/Inserting and Removing List Items - Slides.pptx
+++ b/Mapped Curriculum Lessons/Grade 7/Lesson 23 - Inserting and Removing List Items/Inserting and Removing List Items - Slides.pptx
@@ -2,28 +2,28 @@
 <file path=ppt/presentation.xml><?xml version="1.0" encoding="utf-8"?>
 <p:presentation xmlns:p="http://schemas.openxmlformats.org/presentationml/2006/main" embedTrueTypeFonts="1" saveSubsetFonts="0">
   <p:sldMasterIdLst>
-    <p:sldMasterId xmlns:r="http://schemas.openxmlformats.org/officeDocument/2006/relationships" id="2147483648" r:id="R17ca8491ddf14327"/>
+    <p:sldMasterId xmlns:r="http://schemas.openxmlformats.org/officeDocument/2006/relationships" id="2147483648" r:id="Rc943f316b3464c68"/>
   </p:sldMasterIdLst>
   <p:notesMasterIdLst>
-    <p:notesMasterId xmlns:r="http://schemas.openxmlformats.org/officeDocument/2006/relationships" r:id="R1514d91b9c754b01"/>
+    <p:notesMasterId xmlns:r="http://schemas.openxmlformats.org/officeDocument/2006/relationships" r:id="R3b3ba273cd4a4f8b"/>
   </p:notesMasterIdLst>
   <p:sldIdLst>
-    <p:sldId xmlns:r="http://schemas.openxmlformats.org/officeDocument/2006/relationships" id="256" r:id="Re376e4cfd31b4cd6"/>
-    <p:sldId xmlns:r="http://schemas.openxmlformats.org/officeDocument/2006/relationships" id="257" r:id="R8e249730a70c4073"/>
-    <p:sldId xmlns:r="http://schemas.openxmlformats.org/officeDocument/2006/relationships" id="258" r:id="R41de30f67c1b43c8"/>
-    <p:sldId xmlns:r="http://schemas.openxmlformats.org/officeDocument/2006/relationships" id="259" r:id="Rd6d52bc32a084e6c"/>
-    <p:sldId xmlns:r="http://schemas.openxmlformats.org/officeDocument/2006/relationships" id="260" r:id="R3e4c1bbf8b38477d"/>
-    <p:sldId xmlns:r="http://schemas.openxmlformats.org/officeDocument/2006/relationships" id="261" r:id="R2e38992cc8c34c5a"/>
-    <p:sldId xmlns:r="http://schemas.openxmlformats.org/officeDocument/2006/relationships" id="262" r:id="R10ee6986dee84916"/>
-    <p:sldId xmlns:r="http://schemas.openxmlformats.org/officeDocument/2006/relationships" id="263" r:id="R38d5f459447e45aa"/>
-    <p:sldId xmlns:r="http://schemas.openxmlformats.org/officeDocument/2006/relationships" id="264" r:id="R463fb5706f7842e1"/>
+    <p:sldId xmlns:r="http://schemas.openxmlformats.org/officeDocument/2006/relationships" id="256" r:id="R4fe9839e24bc4700"/>
+    <p:sldId xmlns:r="http://schemas.openxmlformats.org/officeDocument/2006/relationships" id="257" r:id="R8288620793e544a6"/>
+    <p:sldId xmlns:r="http://schemas.openxmlformats.org/officeDocument/2006/relationships" id="258" r:id="R01e5a82b7169445e"/>
+    <p:sldId xmlns:r="http://schemas.openxmlformats.org/officeDocument/2006/relationships" id="259" r:id="R2432ca1d522a4595"/>
+    <p:sldId xmlns:r="http://schemas.openxmlformats.org/officeDocument/2006/relationships" id="260" r:id="Rbd38477fe93740b8"/>
+    <p:sldId xmlns:r="http://schemas.openxmlformats.org/officeDocument/2006/relationships" id="261" r:id="Rfb27058f7edd49b9"/>
+    <p:sldId xmlns:r="http://schemas.openxmlformats.org/officeDocument/2006/relationships" id="262" r:id="R765a6300d5a94a82"/>
+    <p:sldId xmlns:r="http://schemas.openxmlformats.org/officeDocument/2006/relationships" id="263" r:id="R6fbc52244b514b2e"/>
+    <p:sldId xmlns:r="http://schemas.openxmlformats.org/officeDocument/2006/relationships" id="264" r:id="R5d9cf202bc6d4b63"/>
   </p:sldIdLst>
   <p:sldSz cx="12192000" cy="6858000"/>
   <p:notesSz cx="6858000" cy="9144000"/>
   <p:embeddedFontLst>
     <p:embeddedFont>
       <p:font typeface="JetBrains Mono"/>
-      <p:regular xmlns:r="http://schemas.openxmlformats.org/officeDocument/2006/relationships" r:id="R1d24cff6aed64742"/>
+      <p:regular xmlns:r="http://schemas.openxmlformats.org/officeDocument/2006/relationships" r:id="Ra8fde1287a994347"/>
     </p:embeddedFont>
   </p:embeddedFontLst>
 </p:presentation>
@@ -1071,7 +1071,7 @@
           <p:nvPr/>
         </p:nvPicPr>
         <p:blipFill rotWithShape="1">
-          <a:blip xmlns:r="http://schemas.openxmlformats.org/officeDocument/2006/relationships" xmlns:a="http://schemas.openxmlformats.org/drawingml/2006/main" r:embed="Rd695be3e910c473d"/>
+          <a:blip xmlns:r="http://schemas.openxmlformats.org/officeDocument/2006/relationships" xmlns:a="http://schemas.openxmlformats.org/drawingml/2006/main" r:embed="Rca4d54895f2d4204"/>
           <a:stretch xmlns:a="http://schemas.openxmlformats.org/drawingml/2006/main"/>
         </p:blipFill>
         <p:spPr>
@@ -1451,7 +1451,7 @@
           <p:nvPr/>
         </p:nvPicPr>
         <p:blipFill rotWithShape="1">
-          <a:blip xmlns:r="http://schemas.openxmlformats.org/officeDocument/2006/relationships" xmlns:a="http://schemas.openxmlformats.org/drawingml/2006/main" r:embed="R9fd7dac5ea8843dd">
+          <a:blip xmlns:r="http://schemas.openxmlformats.org/officeDocument/2006/relationships" xmlns:a="http://schemas.openxmlformats.org/drawingml/2006/main" r:embed="R0f3bb21d7389444b">
             <a:alphaModFix amt="28000"/>
           </a:blip>
           <a:stretch xmlns:a="http://schemas.openxmlformats.org/drawingml/2006/main"/>
@@ -1664,7 +1664,7 @@
           <p:nvPr/>
         </p:nvPicPr>
         <p:blipFill rotWithShape="1">
-          <a:blip xmlns:r="http://schemas.openxmlformats.org/officeDocument/2006/relationships" xmlns:a="http://schemas.openxmlformats.org/drawingml/2006/main" r:embed="R0aa7abfa3a2e4c28">
+          <a:blip xmlns:r="http://schemas.openxmlformats.org/officeDocument/2006/relationships" xmlns:a="http://schemas.openxmlformats.org/drawingml/2006/main" r:embed="Rd46146c2442e4fa8">
             <a:alphaModFix amt="28000"/>
           </a:blip>
           <a:stretch xmlns:a="http://schemas.openxmlformats.org/drawingml/2006/main"/>
@@ -1899,7 +1899,7 @@
           <p:nvPr/>
         </p:nvPicPr>
         <p:blipFill rotWithShape="1">
-          <a:blip xmlns:r="http://schemas.openxmlformats.org/officeDocument/2006/relationships" xmlns:a="http://schemas.openxmlformats.org/drawingml/2006/main" r:embed="Red58d7bba6fb43e7">
+          <a:blip xmlns:r="http://schemas.openxmlformats.org/officeDocument/2006/relationships" xmlns:a="http://schemas.openxmlformats.org/drawingml/2006/main" r:embed="Ra9d33ce275fc4e58">
             <a:alphaModFix amt="28000"/>
           </a:blip>
           <a:stretch xmlns:a="http://schemas.openxmlformats.org/drawingml/2006/main"/>
@@ -2176,7 +2176,7 @@
           <p:nvPr/>
         </p:nvPicPr>
         <p:blipFill rotWithShape="1">
-          <a:blip xmlns:r="http://schemas.openxmlformats.org/officeDocument/2006/relationships" xmlns:a="http://schemas.openxmlformats.org/drawingml/2006/main" r:embed="Rf3a24ac5ba39441b">
+          <a:blip xmlns:r="http://schemas.openxmlformats.org/officeDocument/2006/relationships" xmlns:a="http://schemas.openxmlformats.org/drawingml/2006/main" r:embed="R058d3ce2f9184c19">
             <a:alphaModFix amt="28000"/>
           </a:blip>
           <a:stretch xmlns:a="http://schemas.openxmlformats.org/drawingml/2006/main"/>
@@ -2451,7 +2451,7 @@
           <p:nvPr/>
         </p:nvPicPr>
         <p:blipFill rotWithShape="1">
-          <a:blip xmlns:r="http://schemas.openxmlformats.org/officeDocument/2006/relationships" xmlns:a="http://schemas.openxmlformats.org/drawingml/2006/main" r:embed="Rfe07128260394637">
+          <a:blip xmlns:r="http://schemas.openxmlformats.org/officeDocument/2006/relationships" xmlns:a="http://schemas.openxmlformats.org/drawingml/2006/main" r:embed="Ref56b0890d044b6a">
             <a:alphaModFix amt="28000"/>
           </a:blip>
           <a:stretch xmlns:a="http://schemas.openxmlformats.org/drawingml/2006/main"/>
@@ -2875,7 +2875,7 @@
           <p:nvPr/>
         </p:nvPicPr>
         <p:blipFill rotWithShape="1">
-          <a:blip xmlns:r="http://schemas.openxmlformats.org/officeDocument/2006/relationships" xmlns:a="http://schemas.openxmlformats.org/drawingml/2006/main" r:embed="R07b43ceaeb0c42ef">
+          <a:blip xmlns:r="http://schemas.openxmlformats.org/officeDocument/2006/relationships" xmlns:a="http://schemas.openxmlformats.org/drawingml/2006/main" r:embed="Rc4227341d8cc4e0c">
             <a:alphaModFix amt="28000"/>
           </a:blip>
           <a:stretch xmlns:a="http://schemas.openxmlformats.org/drawingml/2006/main"/>
@@ -3016,7 +3016,7 @@
           <p:nvPr/>
         </p:nvPicPr>
         <p:blipFill rotWithShape="1">
-          <a:blip xmlns:r="http://schemas.openxmlformats.org/officeDocument/2006/relationships" xmlns:a="http://schemas.openxmlformats.org/drawingml/2006/main" r:embed="R62bd4968a89c4532">
+          <a:blip xmlns:r="http://schemas.openxmlformats.org/officeDocument/2006/relationships" xmlns:a="http://schemas.openxmlformats.org/drawingml/2006/main" r:embed="Rcdeb1a773e5c44f2">
             <a:alphaModFix amt="28000"/>
           </a:blip>
           <a:stretch xmlns:a="http://schemas.openxmlformats.org/drawingml/2006/main"/>
@@ -3130,7 +3130,7 @@
           <p:nvPr/>
         </p:nvPicPr>
         <p:blipFill rotWithShape="1">
-          <a:blip xmlns:r="http://schemas.openxmlformats.org/officeDocument/2006/relationships" xmlns:a="http://schemas.openxmlformats.org/drawingml/2006/main" r:embed="Rdaabcc0feede4680">
+          <a:blip xmlns:r="http://schemas.openxmlformats.org/officeDocument/2006/relationships" xmlns:a="http://schemas.openxmlformats.org/drawingml/2006/main" r:embed="R479235a97c6a4472">
             <a:alphaModFix amt="28000"/>
           </a:blip>
           <a:stretch xmlns:a="http://schemas.openxmlformats.org/drawingml/2006/main"/>
@@ -3457,7 +3457,7 @@
           <p:nvPr/>
         </p:nvPicPr>
         <p:blipFill rotWithShape="1">
-          <a:blip xmlns:r="http://schemas.openxmlformats.org/officeDocument/2006/relationships" xmlns:a="http://schemas.openxmlformats.org/drawingml/2006/main" r:embed="R6eeb6600588c410d">
+          <a:blip xmlns:r="http://schemas.openxmlformats.org/officeDocument/2006/relationships" xmlns:a="http://schemas.openxmlformats.org/drawingml/2006/main" r:embed="R6321e51c070f4f1c">
             <a:alphaModFix amt="28000"/>
           </a:blip>
           <a:stretch xmlns:a="http://schemas.openxmlformats.org/drawingml/2006/main"/>
@@ -3745,7 +3745,7 @@
           <p:nvPr/>
         </p:nvPicPr>
         <p:blipFill rotWithShape="1">
-          <a:blip xmlns:r="http://schemas.openxmlformats.org/officeDocument/2006/relationships" xmlns:a="http://schemas.openxmlformats.org/drawingml/2006/main" r:embed="R98f543c332764046">
+          <a:blip xmlns:r="http://schemas.openxmlformats.org/officeDocument/2006/relationships" xmlns:a="http://schemas.openxmlformats.org/drawingml/2006/main" r:embed="Re3ee746923c643f8">
             <a:alphaModFix amt="28000"/>
           </a:blip>
           <a:stretch xmlns:a="http://schemas.openxmlformats.org/drawingml/2006/main"/>
@@ -3982,17 +3982,17 @@
   </p:cSld>
   <p:clrMap bg1="lt1" tx1="dk1" bg2="lt2" tx2="dk2" accent1="accent1" accent2="accent2" accent3="accent3" accent4="accent4" accent5="accent5" accent6="accent6" hlink="hlink" folHlink="folHlink"/>
   <p:sldLayoutIdLst>
-    <p:sldLayoutId xmlns:r="http://schemas.openxmlformats.org/officeDocument/2006/relationships" id="2147483649" r:id="R379b8585ccc04534"/>
-    <p:sldLayoutId xmlns:r="http://schemas.openxmlformats.org/officeDocument/2006/relationships" id="2147483650" r:id="R659f090e8a67494a"/>
-    <p:sldLayoutId xmlns:r="http://schemas.openxmlformats.org/officeDocument/2006/relationships" id="2147483651" r:id="R85b34a98cdb24f29"/>
-    <p:sldLayoutId xmlns:r="http://schemas.openxmlformats.org/officeDocument/2006/relationships" id="2147483652" r:id="Red6809fe1726429f"/>
-    <p:sldLayoutId xmlns:r="http://schemas.openxmlformats.org/officeDocument/2006/relationships" id="2147483653" r:id="Rf2d13f1480de4515"/>
-    <p:sldLayoutId xmlns:r="http://schemas.openxmlformats.org/officeDocument/2006/relationships" id="2147483654" r:id="R51660da3e31c4b14"/>
-    <p:sldLayoutId xmlns:r="http://schemas.openxmlformats.org/officeDocument/2006/relationships" id="2147483655" r:id="R28df60e6e4364bab"/>
-    <p:sldLayoutId xmlns:r="http://schemas.openxmlformats.org/officeDocument/2006/relationships" id="2147483656" r:id="Rf30bf3eb688b45d3"/>
-    <p:sldLayoutId xmlns:r="http://schemas.openxmlformats.org/officeDocument/2006/relationships" id="2147483657" r:id="R0538f8c527774db1"/>
-    <p:sldLayoutId xmlns:r="http://schemas.openxmlformats.org/officeDocument/2006/relationships" id="2147483658" r:id="R1bd217621c0b447e"/>
-    <p:sldLayoutId xmlns:r="http://schemas.openxmlformats.org/officeDocument/2006/relationships" id="2147483659" r:id="Ra37e6123bbf24c94"/>
+    <p:sldLayoutId xmlns:r="http://schemas.openxmlformats.org/officeDocument/2006/relationships" id="2147483649" r:id="Ra0843ce88c8c435a"/>
+    <p:sldLayoutId xmlns:r="http://schemas.openxmlformats.org/officeDocument/2006/relationships" id="2147483650" r:id="R6d18fc2e66a6444c"/>
+    <p:sldLayoutId xmlns:r="http://schemas.openxmlformats.org/officeDocument/2006/relationships" id="2147483651" r:id="R372cfc375cb5487b"/>
+    <p:sldLayoutId xmlns:r="http://schemas.openxmlformats.org/officeDocument/2006/relationships" id="2147483652" r:id="Rbc1db3800e884fe6"/>
+    <p:sldLayoutId xmlns:r="http://schemas.openxmlformats.org/officeDocument/2006/relationships" id="2147483653" r:id="Rb2e23cd60998463a"/>
+    <p:sldLayoutId xmlns:r="http://schemas.openxmlformats.org/officeDocument/2006/relationships" id="2147483654" r:id="Rf3ff7bbeaaf0478d"/>
+    <p:sldLayoutId xmlns:r="http://schemas.openxmlformats.org/officeDocument/2006/relationships" id="2147483655" r:id="R719847aedf00499f"/>
+    <p:sldLayoutId xmlns:r="http://schemas.openxmlformats.org/officeDocument/2006/relationships" id="2147483656" r:id="R86ec5afe9aea4719"/>
+    <p:sldLayoutId xmlns:r="http://schemas.openxmlformats.org/officeDocument/2006/relationships" id="2147483657" r:id="R7f01de044a3244fc"/>
+    <p:sldLayoutId xmlns:r="http://schemas.openxmlformats.org/officeDocument/2006/relationships" id="2147483658" r:id="R8488865cb25f439f"/>
+    <p:sldLayoutId xmlns:r="http://schemas.openxmlformats.org/officeDocument/2006/relationships" id="2147483659" r:id="Re823eb1f29604d1a"/>
   </p:sldLayoutIdLst>
   <p:hf hdr="0" ftr="0" dt="0"/>
   <p:txStyles>

--- a/Mapped Curriculum Lessons/Grade 7/Lesson 23 - Inserting and Removing List Items/Inserting and Removing List Items - Slides.pptx
+++ b/Mapped Curriculum Lessons/Grade 7/Lesson 23 - Inserting and Removing List Items/Inserting and Removing List Items - Slides.pptx
@@ -2,28 +2,28 @@
 <file path=ppt/presentation.xml><?xml version="1.0" encoding="utf-8"?>
 <p:presentation xmlns:p="http://schemas.openxmlformats.org/presentationml/2006/main" embedTrueTypeFonts="1" saveSubsetFonts="0">
   <p:sldMasterIdLst>
-    <p:sldMasterId xmlns:r="http://schemas.openxmlformats.org/officeDocument/2006/relationships" id="2147483648" r:id="Rc943f316b3464c68"/>
+    <p:sldMasterId xmlns:r="http://schemas.openxmlformats.org/officeDocument/2006/relationships" id="2147483648" r:id="R421e98fc9e444807"/>
   </p:sldMasterIdLst>
   <p:notesMasterIdLst>
-    <p:notesMasterId xmlns:r="http://schemas.openxmlformats.org/officeDocument/2006/relationships" r:id="R3b3ba273cd4a4f8b"/>
+    <p:notesMasterId xmlns:r="http://schemas.openxmlformats.org/officeDocument/2006/relationships" r:id="R6ab6f7bd6087474c"/>
   </p:notesMasterIdLst>
   <p:sldIdLst>
-    <p:sldId xmlns:r="http://schemas.openxmlformats.org/officeDocument/2006/relationships" id="256" r:id="R4fe9839e24bc4700"/>
-    <p:sldId xmlns:r="http://schemas.openxmlformats.org/officeDocument/2006/relationships" id="257" r:id="R8288620793e544a6"/>
-    <p:sldId xmlns:r="http://schemas.openxmlformats.org/officeDocument/2006/relationships" id="258" r:id="R01e5a82b7169445e"/>
-    <p:sldId xmlns:r="http://schemas.openxmlformats.org/officeDocument/2006/relationships" id="259" r:id="R2432ca1d522a4595"/>
-    <p:sldId xmlns:r="http://schemas.openxmlformats.org/officeDocument/2006/relationships" id="260" r:id="Rbd38477fe93740b8"/>
-    <p:sldId xmlns:r="http://schemas.openxmlformats.org/officeDocument/2006/relationships" id="261" r:id="Rfb27058f7edd49b9"/>
-    <p:sldId xmlns:r="http://schemas.openxmlformats.org/officeDocument/2006/relationships" id="262" r:id="R765a6300d5a94a82"/>
-    <p:sldId xmlns:r="http://schemas.openxmlformats.org/officeDocument/2006/relationships" id="263" r:id="R6fbc52244b514b2e"/>
-    <p:sldId xmlns:r="http://schemas.openxmlformats.org/officeDocument/2006/relationships" id="264" r:id="R5d9cf202bc6d4b63"/>
+    <p:sldId xmlns:r="http://schemas.openxmlformats.org/officeDocument/2006/relationships" id="256" r:id="R5c8790c7f6a047b8"/>
+    <p:sldId xmlns:r="http://schemas.openxmlformats.org/officeDocument/2006/relationships" id="257" r:id="R674ff236825f40d0"/>
+    <p:sldId xmlns:r="http://schemas.openxmlformats.org/officeDocument/2006/relationships" id="258" r:id="R5c3911b0f1a54e93"/>
+    <p:sldId xmlns:r="http://schemas.openxmlformats.org/officeDocument/2006/relationships" id="259" r:id="R4f51285fb9b24a69"/>
+    <p:sldId xmlns:r="http://schemas.openxmlformats.org/officeDocument/2006/relationships" id="260" r:id="R879c8eb9f5d646bd"/>
+    <p:sldId xmlns:r="http://schemas.openxmlformats.org/officeDocument/2006/relationships" id="261" r:id="Re4207568f9e9405a"/>
+    <p:sldId xmlns:r="http://schemas.openxmlformats.org/officeDocument/2006/relationships" id="262" r:id="R6223a82d29b04709"/>
+    <p:sldId xmlns:r="http://schemas.openxmlformats.org/officeDocument/2006/relationships" id="263" r:id="R408fe3cf19f24834"/>
+    <p:sldId xmlns:r="http://schemas.openxmlformats.org/officeDocument/2006/relationships" id="264" r:id="R76ca2edb44144385"/>
   </p:sldIdLst>
   <p:sldSz cx="12192000" cy="6858000"/>
   <p:notesSz cx="6858000" cy="9144000"/>
   <p:embeddedFontLst>
     <p:embeddedFont>
       <p:font typeface="JetBrains Mono"/>
-      <p:regular xmlns:r="http://schemas.openxmlformats.org/officeDocument/2006/relationships" r:id="Ra8fde1287a994347"/>
+      <p:regular xmlns:r="http://schemas.openxmlformats.org/officeDocument/2006/relationships" r:id="R07a56c7b5f744226"/>
     </p:embeddedFont>
   </p:embeddedFontLst>
 </p:presentation>
@@ -1071,7 +1071,7 @@
           <p:nvPr/>
         </p:nvPicPr>
         <p:blipFill rotWithShape="1">
-          <a:blip xmlns:r="http://schemas.openxmlformats.org/officeDocument/2006/relationships" xmlns:a="http://schemas.openxmlformats.org/drawingml/2006/main" r:embed="Rca4d54895f2d4204"/>
+          <a:blip xmlns:r="http://schemas.openxmlformats.org/officeDocument/2006/relationships" xmlns:a="http://schemas.openxmlformats.org/drawingml/2006/main" r:embed="R97c10579c709418b"/>
           <a:stretch xmlns:a="http://schemas.openxmlformats.org/drawingml/2006/main"/>
         </p:blipFill>
         <p:spPr>
@@ -1451,7 +1451,7 @@
           <p:nvPr/>
         </p:nvPicPr>
         <p:blipFill rotWithShape="1">
-          <a:blip xmlns:r="http://schemas.openxmlformats.org/officeDocument/2006/relationships" xmlns:a="http://schemas.openxmlformats.org/drawingml/2006/main" r:embed="R0f3bb21d7389444b">
+          <a:blip xmlns:r="http://schemas.openxmlformats.org/officeDocument/2006/relationships" xmlns:a="http://schemas.openxmlformats.org/drawingml/2006/main" r:embed="Rc390046e7f1e4898">
             <a:alphaModFix amt="28000"/>
           </a:blip>
           <a:stretch xmlns:a="http://schemas.openxmlformats.org/drawingml/2006/main"/>
@@ -1664,7 +1664,7 @@
           <p:nvPr/>
         </p:nvPicPr>
         <p:blipFill rotWithShape="1">
-          <a:blip xmlns:r="http://schemas.openxmlformats.org/officeDocument/2006/relationships" xmlns:a="http://schemas.openxmlformats.org/drawingml/2006/main" r:embed="Rd46146c2442e4fa8">
+          <a:blip xmlns:r="http://schemas.openxmlformats.org/officeDocument/2006/relationships" xmlns:a="http://schemas.openxmlformats.org/drawingml/2006/main" r:embed="R657d273080244b6b">
             <a:alphaModFix amt="28000"/>
           </a:blip>
           <a:stretch xmlns:a="http://schemas.openxmlformats.org/drawingml/2006/main"/>
@@ -1899,7 +1899,7 @@
           <p:nvPr/>
         </p:nvPicPr>
         <p:blipFill rotWithShape="1">
-          <a:blip xmlns:r="http://schemas.openxmlformats.org/officeDocument/2006/relationships" xmlns:a="http://schemas.openxmlformats.org/drawingml/2006/main" r:embed="Ra9d33ce275fc4e58">
+          <a:blip xmlns:r="http://schemas.openxmlformats.org/officeDocument/2006/relationships" xmlns:a="http://schemas.openxmlformats.org/drawingml/2006/main" r:embed="Rf3e23f25748f4472">
             <a:alphaModFix amt="28000"/>
           </a:blip>
           <a:stretch xmlns:a="http://schemas.openxmlformats.org/drawingml/2006/main"/>
@@ -2176,7 +2176,7 @@
           <p:nvPr/>
         </p:nvPicPr>
         <p:blipFill rotWithShape="1">
-          <a:blip xmlns:r="http://schemas.openxmlformats.org/officeDocument/2006/relationships" xmlns:a="http://schemas.openxmlformats.org/drawingml/2006/main" r:embed="R058d3ce2f9184c19">
+          <a:blip xmlns:r="http://schemas.openxmlformats.org/officeDocument/2006/relationships" xmlns:a="http://schemas.openxmlformats.org/drawingml/2006/main" r:embed="R019a9a989e014ede">
             <a:alphaModFix amt="28000"/>
           </a:blip>
           <a:stretch xmlns:a="http://schemas.openxmlformats.org/drawingml/2006/main"/>
@@ -2451,7 +2451,7 @@
           <p:nvPr/>
         </p:nvPicPr>
         <p:blipFill rotWithShape="1">
-          <a:blip xmlns:r="http://schemas.openxmlformats.org/officeDocument/2006/relationships" xmlns:a="http://schemas.openxmlformats.org/drawingml/2006/main" r:embed="Ref56b0890d044b6a">
+          <a:blip xmlns:r="http://schemas.openxmlformats.org/officeDocument/2006/relationships" xmlns:a="http://schemas.openxmlformats.org/drawingml/2006/main" r:embed="R21c1b37284a64d96">
             <a:alphaModFix amt="28000"/>
           </a:blip>
           <a:stretch xmlns:a="http://schemas.openxmlformats.org/drawingml/2006/main"/>
@@ -2875,7 +2875,7 @@
           <p:nvPr/>
         </p:nvPicPr>
         <p:blipFill rotWithShape="1">
-          <a:blip xmlns:r="http://schemas.openxmlformats.org/officeDocument/2006/relationships" xmlns:a="http://schemas.openxmlformats.org/drawingml/2006/main" r:embed="Rc4227341d8cc4e0c">
+          <a:blip xmlns:r="http://schemas.openxmlformats.org/officeDocument/2006/relationships" xmlns:a="http://schemas.openxmlformats.org/drawingml/2006/main" r:embed="Ra75c98a3082b4559">
             <a:alphaModFix amt="28000"/>
           </a:blip>
           <a:stretch xmlns:a="http://schemas.openxmlformats.org/drawingml/2006/main"/>
@@ -3016,7 +3016,7 @@
           <p:nvPr/>
         </p:nvPicPr>
         <p:blipFill rotWithShape="1">
-          <a:blip xmlns:r="http://schemas.openxmlformats.org/officeDocument/2006/relationships" xmlns:a="http://schemas.openxmlformats.org/drawingml/2006/main" r:embed="Rcdeb1a773e5c44f2">
+          <a:blip xmlns:r="http://schemas.openxmlformats.org/officeDocument/2006/relationships" xmlns:a="http://schemas.openxmlformats.org/drawingml/2006/main" r:embed="Rba895027734c4aa1">
             <a:alphaModFix amt="28000"/>
           </a:blip>
           <a:stretch xmlns:a="http://schemas.openxmlformats.org/drawingml/2006/main"/>
@@ -3130,7 +3130,7 @@
           <p:nvPr/>
         </p:nvPicPr>
         <p:blipFill rotWithShape="1">
-          <a:blip xmlns:r="http://schemas.openxmlformats.org/officeDocument/2006/relationships" xmlns:a="http://schemas.openxmlformats.org/drawingml/2006/main" r:embed="R479235a97c6a4472">
+          <a:blip xmlns:r="http://schemas.openxmlformats.org/officeDocument/2006/relationships" xmlns:a="http://schemas.openxmlformats.org/drawingml/2006/main" r:embed="R694c6f1e76e34be9">
             <a:alphaModFix amt="28000"/>
           </a:blip>
           <a:stretch xmlns:a="http://schemas.openxmlformats.org/drawingml/2006/main"/>
@@ -3457,7 +3457,7 @@
           <p:nvPr/>
         </p:nvPicPr>
         <p:blipFill rotWithShape="1">
-          <a:blip xmlns:r="http://schemas.openxmlformats.org/officeDocument/2006/relationships" xmlns:a="http://schemas.openxmlformats.org/drawingml/2006/main" r:embed="R6321e51c070f4f1c">
+          <a:blip xmlns:r="http://schemas.openxmlformats.org/officeDocument/2006/relationships" xmlns:a="http://schemas.openxmlformats.org/drawingml/2006/main" r:embed="Rb6956b8166624c7c">
             <a:alphaModFix amt="28000"/>
           </a:blip>
           <a:stretch xmlns:a="http://schemas.openxmlformats.org/drawingml/2006/main"/>
@@ -3745,7 +3745,7 @@
           <p:nvPr/>
         </p:nvPicPr>
         <p:blipFill rotWithShape="1">
-          <a:blip xmlns:r="http://schemas.openxmlformats.org/officeDocument/2006/relationships" xmlns:a="http://schemas.openxmlformats.org/drawingml/2006/main" r:embed="Re3ee746923c643f8">
+          <a:blip xmlns:r="http://schemas.openxmlformats.org/officeDocument/2006/relationships" xmlns:a="http://schemas.openxmlformats.org/drawingml/2006/main" r:embed="R594223863ad84bd9">
             <a:alphaModFix amt="28000"/>
           </a:blip>
           <a:stretch xmlns:a="http://schemas.openxmlformats.org/drawingml/2006/main"/>
@@ -3982,17 +3982,17 @@
   </p:cSld>
   <p:clrMap bg1="lt1" tx1="dk1" bg2="lt2" tx2="dk2" accent1="accent1" accent2="accent2" accent3="accent3" accent4="accent4" accent5="accent5" accent6="accent6" hlink="hlink" folHlink="folHlink"/>
   <p:sldLayoutIdLst>
-    <p:sldLayoutId xmlns:r="http://schemas.openxmlformats.org/officeDocument/2006/relationships" id="2147483649" r:id="Ra0843ce88c8c435a"/>
-    <p:sldLayoutId xmlns:r="http://schemas.openxmlformats.org/officeDocument/2006/relationships" id="2147483650" r:id="R6d18fc2e66a6444c"/>
-    <p:sldLayoutId xmlns:r="http://schemas.openxmlformats.org/officeDocument/2006/relationships" id="2147483651" r:id="R372cfc375cb5487b"/>
-    <p:sldLayoutId xmlns:r="http://schemas.openxmlformats.org/officeDocument/2006/relationships" id="2147483652" r:id="Rbc1db3800e884fe6"/>
-    <p:sldLayoutId xmlns:r="http://schemas.openxmlformats.org/officeDocument/2006/relationships" id="2147483653" r:id="Rb2e23cd60998463a"/>
-    <p:sldLayoutId xmlns:r="http://schemas.openxmlformats.org/officeDocument/2006/relationships" id="2147483654" r:id="Rf3ff7bbeaaf0478d"/>
-    <p:sldLayoutId xmlns:r="http://schemas.openxmlformats.org/officeDocument/2006/relationships" id="2147483655" r:id="R719847aedf00499f"/>
-    <p:sldLayoutId xmlns:r="http://schemas.openxmlformats.org/officeDocument/2006/relationships" id="2147483656" r:id="R86ec5afe9aea4719"/>
-    <p:sldLayoutId xmlns:r="http://schemas.openxmlformats.org/officeDocument/2006/relationships" id="2147483657" r:id="R7f01de044a3244fc"/>
-    <p:sldLayoutId xmlns:r="http://schemas.openxmlformats.org/officeDocument/2006/relationships" id="2147483658" r:id="R8488865cb25f439f"/>
-    <p:sldLayoutId xmlns:r="http://schemas.openxmlformats.org/officeDocument/2006/relationships" id="2147483659" r:id="Re823eb1f29604d1a"/>
+    <p:sldLayoutId xmlns:r="http://schemas.openxmlformats.org/officeDocument/2006/relationships" id="2147483649" r:id="R0f15da3fd9d54eb4"/>
+    <p:sldLayoutId xmlns:r="http://schemas.openxmlformats.org/officeDocument/2006/relationships" id="2147483650" r:id="R325cc3de885c4954"/>
+    <p:sldLayoutId xmlns:r="http://schemas.openxmlformats.org/officeDocument/2006/relationships" id="2147483651" r:id="R13a451bc58054ddc"/>
+    <p:sldLayoutId xmlns:r="http://schemas.openxmlformats.org/officeDocument/2006/relationships" id="2147483652" r:id="R58c04bbdebf74869"/>
+    <p:sldLayoutId xmlns:r="http://schemas.openxmlformats.org/officeDocument/2006/relationships" id="2147483653" r:id="Rb650e6ca70e049d7"/>
+    <p:sldLayoutId xmlns:r="http://schemas.openxmlformats.org/officeDocument/2006/relationships" id="2147483654" r:id="R00ee9120901c4af7"/>
+    <p:sldLayoutId xmlns:r="http://schemas.openxmlformats.org/officeDocument/2006/relationships" id="2147483655" r:id="R61239838321c4133"/>
+    <p:sldLayoutId xmlns:r="http://schemas.openxmlformats.org/officeDocument/2006/relationships" id="2147483656" r:id="R79acf1d0eb6f4e65"/>
+    <p:sldLayoutId xmlns:r="http://schemas.openxmlformats.org/officeDocument/2006/relationships" id="2147483657" r:id="R1cf72d550781475e"/>
+    <p:sldLayoutId xmlns:r="http://schemas.openxmlformats.org/officeDocument/2006/relationships" id="2147483658" r:id="R63773cedcff64e72"/>
+    <p:sldLayoutId xmlns:r="http://schemas.openxmlformats.org/officeDocument/2006/relationships" id="2147483659" r:id="Rf3d786022b384caa"/>
   </p:sldLayoutIdLst>
   <p:hf hdr="0" ftr="0" dt="0"/>
   <p:txStyles>

--- a/Mapped Curriculum Lessons/Grade 7/Lesson 23 - Inserting and Removing List Items/Inserting and Removing List Items - Slides.pptx
+++ b/Mapped Curriculum Lessons/Grade 7/Lesson 23 - Inserting and Removing List Items/Inserting and Removing List Items - Slides.pptx
@@ -2,28 +2,28 @@
 <file path=ppt/presentation.xml><?xml version="1.0" encoding="utf-8"?>
 <p:presentation xmlns:p="http://schemas.openxmlformats.org/presentationml/2006/main" embedTrueTypeFonts="1" saveSubsetFonts="0">
   <p:sldMasterIdLst>
-    <p:sldMasterId xmlns:r="http://schemas.openxmlformats.org/officeDocument/2006/relationships" id="2147483648" r:id="R421e98fc9e444807"/>
+    <p:sldMasterId xmlns:r="http://schemas.openxmlformats.org/officeDocument/2006/relationships" id="2147483648" r:id="R2fd4b99f87b9444d"/>
   </p:sldMasterIdLst>
   <p:notesMasterIdLst>
-    <p:notesMasterId xmlns:r="http://schemas.openxmlformats.org/officeDocument/2006/relationships" r:id="R6ab6f7bd6087474c"/>
+    <p:notesMasterId xmlns:r="http://schemas.openxmlformats.org/officeDocument/2006/relationships" r:id="R22ed9d7c7d85422b"/>
   </p:notesMasterIdLst>
   <p:sldIdLst>
-    <p:sldId xmlns:r="http://schemas.openxmlformats.org/officeDocument/2006/relationships" id="256" r:id="R5c8790c7f6a047b8"/>
-    <p:sldId xmlns:r="http://schemas.openxmlformats.org/officeDocument/2006/relationships" id="257" r:id="R674ff236825f40d0"/>
-    <p:sldId xmlns:r="http://schemas.openxmlformats.org/officeDocument/2006/relationships" id="258" r:id="R5c3911b0f1a54e93"/>
-    <p:sldId xmlns:r="http://schemas.openxmlformats.org/officeDocument/2006/relationships" id="259" r:id="R4f51285fb9b24a69"/>
-    <p:sldId xmlns:r="http://schemas.openxmlformats.org/officeDocument/2006/relationships" id="260" r:id="R879c8eb9f5d646bd"/>
-    <p:sldId xmlns:r="http://schemas.openxmlformats.org/officeDocument/2006/relationships" id="261" r:id="Re4207568f9e9405a"/>
-    <p:sldId xmlns:r="http://schemas.openxmlformats.org/officeDocument/2006/relationships" id="262" r:id="R6223a82d29b04709"/>
-    <p:sldId xmlns:r="http://schemas.openxmlformats.org/officeDocument/2006/relationships" id="263" r:id="R408fe3cf19f24834"/>
-    <p:sldId xmlns:r="http://schemas.openxmlformats.org/officeDocument/2006/relationships" id="264" r:id="R76ca2edb44144385"/>
+    <p:sldId xmlns:r="http://schemas.openxmlformats.org/officeDocument/2006/relationships" id="256" r:id="R2b2608ce17694525"/>
+    <p:sldId xmlns:r="http://schemas.openxmlformats.org/officeDocument/2006/relationships" id="257" r:id="R8ee8c9093c8b4379"/>
+    <p:sldId xmlns:r="http://schemas.openxmlformats.org/officeDocument/2006/relationships" id="258" r:id="R53ccb287444545b6"/>
+    <p:sldId xmlns:r="http://schemas.openxmlformats.org/officeDocument/2006/relationships" id="259" r:id="R5458d039e8e74fd3"/>
+    <p:sldId xmlns:r="http://schemas.openxmlformats.org/officeDocument/2006/relationships" id="260" r:id="Rbe95c2a1536843b5"/>
+    <p:sldId xmlns:r="http://schemas.openxmlformats.org/officeDocument/2006/relationships" id="261" r:id="R6ad691a213514650"/>
+    <p:sldId xmlns:r="http://schemas.openxmlformats.org/officeDocument/2006/relationships" id="262" r:id="Re550f53ef0874ca5"/>
+    <p:sldId xmlns:r="http://schemas.openxmlformats.org/officeDocument/2006/relationships" id="263" r:id="Rd610b311315f4ac2"/>
+    <p:sldId xmlns:r="http://schemas.openxmlformats.org/officeDocument/2006/relationships" id="264" r:id="R30e3f9b6edc6434c"/>
   </p:sldIdLst>
   <p:sldSz cx="12192000" cy="6858000"/>
   <p:notesSz cx="6858000" cy="9144000"/>
   <p:embeddedFontLst>
     <p:embeddedFont>
       <p:font typeface="JetBrains Mono"/>
-      <p:regular xmlns:r="http://schemas.openxmlformats.org/officeDocument/2006/relationships" r:id="R07a56c7b5f744226"/>
+      <p:regular xmlns:r="http://schemas.openxmlformats.org/officeDocument/2006/relationships" r:id="Rf2b55e93c07f42de"/>
     </p:embeddedFont>
   </p:embeddedFontLst>
 </p:presentation>
@@ -1071,7 +1071,7 @@
           <p:nvPr/>
         </p:nvPicPr>
         <p:blipFill rotWithShape="1">
-          <a:blip xmlns:r="http://schemas.openxmlformats.org/officeDocument/2006/relationships" xmlns:a="http://schemas.openxmlformats.org/drawingml/2006/main" r:embed="R97c10579c709418b"/>
+          <a:blip xmlns:r="http://schemas.openxmlformats.org/officeDocument/2006/relationships" xmlns:a="http://schemas.openxmlformats.org/drawingml/2006/main" r:embed="Rd0d35ad933b742a7"/>
           <a:stretch xmlns:a="http://schemas.openxmlformats.org/drawingml/2006/main"/>
         </p:blipFill>
         <p:spPr>
@@ -1451,7 +1451,7 @@
           <p:nvPr/>
         </p:nvPicPr>
         <p:blipFill rotWithShape="1">
-          <a:blip xmlns:r="http://schemas.openxmlformats.org/officeDocument/2006/relationships" xmlns:a="http://schemas.openxmlformats.org/drawingml/2006/main" r:embed="Rc390046e7f1e4898">
+          <a:blip xmlns:r="http://schemas.openxmlformats.org/officeDocument/2006/relationships" xmlns:a="http://schemas.openxmlformats.org/drawingml/2006/main" r:embed="Rd63faeef5dff4b8d">
             <a:alphaModFix amt="28000"/>
           </a:blip>
           <a:stretch xmlns:a="http://schemas.openxmlformats.org/drawingml/2006/main"/>
@@ -1664,7 +1664,7 @@
           <p:nvPr/>
         </p:nvPicPr>
         <p:blipFill rotWithShape="1">
-          <a:blip xmlns:r="http://schemas.openxmlformats.org/officeDocument/2006/relationships" xmlns:a="http://schemas.openxmlformats.org/drawingml/2006/main" r:embed="R657d273080244b6b">
+          <a:blip xmlns:r="http://schemas.openxmlformats.org/officeDocument/2006/relationships" xmlns:a="http://schemas.openxmlformats.org/drawingml/2006/main" r:embed="Rc7f7ecc290f44d4f">
             <a:alphaModFix amt="28000"/>
           </a:blip>
           <a:stretch xmlns:a="http://schemas.openxmlformats.org/drawingml/2006/main"/>
@@ -1899,7 +1899,7 @@
           <p:nvPr/>
         </p:nvPicPr>
         <p:blipFill rotWithShape="1">
-          <a:blip xmlns:r="http://schemas.openxmlformats.org/officeDocument/2006/relationships" xmlns:a="http://schemas.openxmlformats.org/drawingml/2006/main" r:embed="Rf3e23f25748f4472">
+          <a:blip xmlns:r="http://schemas.openxmlformats.org/officeDocument/2006/relationships" xmlns:a="http://schemas.openxmlformats.org/drawingml/2006/main" r:embed="R1d7f71be8c4f48d4">
             <a:alphaModFix amt="28000"/>
           </a:blip>
           <a:stretch xmlns:a="http://schemas.openxmlformats.org/drawingml/2006/main"/>
@@ -2176,7 +2176,7 @@
           <p:nvPr/>
         </p:nvPicPr>
         <p:blipFill rotWithShape="1">
-          <a:blip xmlns:r="http://schemas.openxmlformats.org/officeDocument/2006/relationships" xmlns:a="http://schemas.openxmlformats.org/drawingml/2006/main" r:embed="R019a9a989e014ede">
+          <a:blip xmlns:r="http://schemas.openxmlformats.org/officeDocument/2006/relationships" xmlns:a="http://schemas.openxmlformats.org/drawingml/2006/main" r:embed="Rdd1770fb07d14d81">
             <a:alphaModFix amt="28000"/>
           </a:blip>
           <a:stretch xmlns:a="http://schemas.openxmlformats.org/drawingml/2006/main"/>
@@ -2451,7 +2451,7 @@
           <p:nvPr/>
         </p:nvPicPr>
         <p:blipFill rotWithShape="1">
-          <a:blip xmlns:r="http://schemas.openxmlformats.org/officeDocument/2006/relationships" xmlns:a="http://schemas.openxmlformats.org/drawingml/2006/main" r:embed="R21c1b37284a64d96">
+          <a:blip xmlns:r="http://schemas.openxmlformats.org/officeDocument/2006/relationships" xmlns:a="http://schemas.openxmlformats.org/drawingml/2006/main" r:embed="R20dcb572c58a483c">
             <a:alphaModFix amt="28000"/>
           </a:blip>
           <a:stretch xmlns:a="http://schemas.openxmlformats.org/drawingml/2006/main"/>
@@ -2875,7 +2875,7 @@
           <p:nvPr/>
         </p:nvPicPr>
         <p:blipFill rotWithShape="1">
-          <a:blip xmlns:r="http://schemas.openxmlformats.org/officeDocument/2006/relationships" xmlns:a="http://schemas.openxmlformats.org/drawingml/2006/main" r:embed="Ra75c98a3082b4559">
+          <a:blip xmlns:r="http://schemas.openxmlformats.org/officeDocument/2006/relationships" xmlns:a="http://schemas.openxmlformats.org/drawingml/2006/main" r:embed="R6141c24a5081455e">
             <a:alphaModFix amt="28000"/>
           </a:blip>
           <a:stretch xmlns:a="http://schemas.openxmlformats.org/drawingml/2006/main"/>
@@ -3016,7 +3016,7 @@
           <p:nvPr/>
         </p:nvPicPr>
         <p:blipFill rotWithShape="1">
-          <a:blip xmlns:r="http://schemas.openxmlformats.org/officeDocument/2006/relationships" xmlns:a="http://schemas.openxmlformats.org/drawingml/2006/main" r:embed="Rba895027734c4aa1">
+          <a:blip xmlns:r="http://schemas.openxmlformats.org/officeDocument/2006/relationships" xmlns:a="http://schemas.openxmlformats.org/drawingml/2006/main" r:embed="Rbc1fb9edd1ae4ac6">
             <a:alphaModFix amt="28000"/>
           </a:blip>
           <a:stretch xmlns:a="http://schemas.openxmlformats.org/drawingml/2006/main"/>
@@ -3130,7 +3130,7 @@
           <p:nvPr/>
         </p:nvPicPr>
         <p:blipFill rotWithShape="1">
-          <a:blip xmlns:r="http://schemas.openxmlformats.org/officeDocument/2006/relationships" xmlns:a="http://schemas.openxmlformats.org/drawingml/2006/main" r:embed="R694c6f1e76e34be9">
+          <a:blip xmlns:r="http://schemas.openxmlformats.org/officeDocument/2006/relationships" xmlns:a="http://schemas.openxmlformats.org/drawingml/2006/main" r:embed="Rfcdf2db5195f43b8">
             <a:alphaModFix amt="28000"/>
           </a:blip>
           <a:stretch xmlns:a="http://schemas.openxmlformats.org/drawingml/2006/main"/>
@@ -3457,7 +3457,7 @@
           <p:nvPr/>
         </p:nvPicPr>
         <p:blipFill rotWithShape="1">
-          <a:blip xmlns:r="http://schemas.openxmlformats.org/officeDocument/2006/relationships" xmlns:a="http://schemas.openxmlformats.org/drawingml/2006/main" r:embed="Rb6956b8166624c7c">
+          <a:blip xmlns:r="http://schemas.openxmlformats.org/officeDocument/2006/relationships" xmlns:a="http://schemas.openxmlformats.org/drawingml/2006/main" r:embed="R38b325bef5ab43f0">
             <a:alphaModFix amt="28000"/>
           </a:blip>
           <a:stretch xmlns:a="http://schemas.openxmlformats.org/drawingml/2006/main"/>
@@ -3745,7 +3745,7 @@
           <p:nvPr/>
         </p:nvPicPr>
         <p:blipFill rotWithShape="1">
-          <a:blip xmlns:r="http://schemas.openxmlformats.org/officeDocument/2006/relationships" xmlns:a="http://schemas.openxmlformats.org/drawingml/2006/main" r:embed="R594223863ad84bd9">
+          <a:blip xmlns:r="http://schemas.openxmlformats.org/officeDocument/2006/relationships" xmlns:a="http://schemas.openxmlformats.org/drawingml/2006/main" r:embed="R11b6f2ffbdca4a78">
             <a:alphaModFix amt="28000"/>
           </a:blip>
           <a:stretch xmlns:a="http://schemas.openxmlformats.org/drawingml/2006/main"/>
@@ -3982,17 +3982,17 @@
   </p:cSld>
   <p:clrMap bg1="lt1" tx1="dk1" bg2="lt2" tx2="dk2" accent1="accent1" accent2="accent2" accent3="accent3" accent4="accent4" accent5="accent5" accent6="accent6" hlink="hlink" folHlink="folHlink"/>
   <p:sldLayoutIdLst>
-    <p:sldLayoutId xmlns:r="http://schemas.openxmlformats.org/officeDocument/2006/relationships" id="2147483649" r:id="R0f15da3fd9d54eb4"/>
-    <p:sldLayoutId xmlns:r="http://schemas.openxmlformats.org/officeDocument/2006/relationships" id="2147483650" r:id="R325cc3de885c4954"/>
-    <p:sldLayoutId xmlns:r="http://schemas.openxmlformats.org/officeDocument/2006/relationships" id="2147483651" r:id="R13a451bc58054ddc"/>
-    <p:sldLayoutId xmlns:r="http://schemas.openxmlformats.org/officeDocument/2006/relationships" id="2147483652" r:id="R58c04bbdebf74869"/>
-    <p:sldLayoutId xmlns:r="http://schemas.openxmlformats.org/officeDocument/2006/relationships" id="2147483653" r:id="Rb650e6ca70e049d7"/>
-    <p:sldLayoutId xmlns:r="http://schemas.openxmlformats.org/officeDocument/2006/relationships" id="2147483654" r:id="R00ee9120901c4af7"/>
-    <p:sldLayoutId xmlns:r="http://schemas.openxmlformats.org/officeDocument/2006/relationships" id="2147483655" r:id="R61239838321c4133"/>
-    <p:sldLayoutId xmlns:r="http://schemas.openxmlformats.org/officeDocument/2006/relationships" id="2147483656" r:id="R79acf1d0eb6f4e65"/>
-    <p:sldLayoutId xmlns:r="http://schemas.openxmlformats.org/officeDocument/2006/relationships" id="2147483657" r:id="R1cf72d550781475e"/>
-    <p:sldLayoutId xmlns:r="http://schemas.openxmlformats.org/officeDocument/2006/relationships" id="2147483658" r:id="R63773cedcff64e72"/>
-    <p:sldLayoutId xmlns:r="http://schemas.openxmlformats.org/officeDocument/2006/relationships" id="2147483659" r:id="Rf3d786022b384caa"/>
+    <p:sldLayoutId xmlns:r="http://schemas.openxmlformats.org/officeDocument/2006/relationships" id="2147483649" r:id="R85cd6aa7dcab480e"/>
+    <p:sldLayoutId xmlns:r="http://schemas.openxmlformats.org/officeDocument/2006/relationships" id="2147483650" r:id="R178366a40119437a"/>
+    <p:sldLayoutId xmlns:r="http://schemas.openxmlformats.org/officeDocument/2006/relationships" id="2147483651" r:id="R2c7440faeb784adc"/>
+    <p:sldLayoutId xmlns:r="http://schemas.openxmlformats.org/officeDocument/2006/relationships" id="2147483652" r:id="Red9717baf2824802"/>
+    <p:sldLayoutId xmlns:r="http://schemas.openxmlformats.org/officeDocument/2006/relationships" id="2147483653" r:id="R5fca2f5175df4964"/>
+    <p:sldLayoutId xmlns:r="http://schemas.openxmlformats.org/officeDocument/2006/relationships" id="2147483654" r:id="Rce240030a4b44166"/>
+    <p:sldLayoutId xmlns:r="http://schemas.openxmlformats.org/officeDocument/2006/relationships" id="2147483655" r:id="R38c4df113cbf4545"/>
+    <p:sldLayoutId xmlns:r="http://schemas.openxmlformats.org/officeDocument/2006/relationships" id="2147483656" r:id="Rf7407266683e4a9c"/>
+    <p:sldLayoutId xmlns:r="http://schemas.openxmlformats.org/officeDocument/2006/relationships" id="2147483657" r:id="Re9ac2364d2744006"/>
+    <p:sldLayoutId xmlns:r="http://schemas.openxmlformats.org/officeDocument/2006/relationships" id="2147483658" r:id="R68c2759cc1a5420b"/>
+    <p:sldLayoutId xmlns:r="http://schemas.openxmlformats.org/officeDocument/2006/relationships" id="2147483659" r:id="R0bab8b08a6d84411"/>
   </p:sldLayoutIdLst>
   <p:hf hdr="0" ftr="0" dt="0"/>
   <p:txStyles>
